--- a/lectures/04_expectation-variance-itmo.pptx
+++ b/lectures/04_expectation-variance-itmo.pptx
@@ -40,6 +40,11 @@
     <p:sldId id="288" r:id="rId39"/>
     <p:sldId id="289" r:id="rId40"/>
     <p:sldId id="290" r:id="rId6"/>
+    <p:sldId id="297" r:id="rId48"/>
+    <p:sldId id="298" r:id="rId49"/>
+    <p:sldId id="299" r:id="rId50"/>
+    <p:sldId id="300" r:id="rId51"/>
+    <p:sldId id="301" r:id="rId52"/>
     <p:sldId id="291" r:id="rId5"/>
     <p:sldId id="292" r:id="rId4"/>
     <p:sldId id="293" r:id="rId3"/>
@@ -10189,7 +10194,7 @@
                 </a:solidFill>
                 <a:latin typeface="Arial"/>
               </a:rPr>
-              <a:t>На σ/√n основаны доверительные интервалы и размер выборки в A/B-тестах.</a:t>
+              <a:t>На σ/√n основаны доверительные интервалы и размер выборки в опросах и измерениях.</a:t>
             </a:r>
           </a:p>
         </p:txBody>
@@ -11961,7 +11966,7 @@
         </p:nvSpPr>
         <p:spPr>
           <a:xfrm>
-            <a:off x="731520" y="2926080"/>
+            <a:off x="667512" y="2926080"/>
             <a:ext cx="182880" cy="182880"/>
           </a:xfrm>
           <a:prstGeom prst="ellipse">
@@ -12004,8 +12009,8 @@
         </p:nvSpPr>
         <p:spPr>
           <a:xfrm>
-            <a:off x="91439" y="2148840"/>
-            <a:ext cx="1463040" cy="685800"/>
+            <a:off x="109728" y="2148840"/>
+            <a:ext cx="1298448" cy="685800"/>
           </a:xfrm>
           <a:prstGeom prst="rect">
             <a:avLst/>
@@ -12043,8 +12048,8 @@
         </p:nvSpPr>
         <p:spPr>
           <a:xfrm>
-            <a:off x="91439" y="3291840"/>
-            <a:ext cx="1463040" cy="548640"/>
+            <a:off x="109728" y="3291840"/>
+            <a:ext cx="1298448" cy="548640"/>
           </a:xfrm>
           <a:prstGeom prst="rect">
             <a:avLst/>
@@ -12082,7 +12087,7 @@
         </p:nvSpPr>
         <p:spPr>
           <a:xfrm>
-            <a:off x="2240279" y="2926080"/>
+            <a:off x="2002536" y="2926080"/>
             <a:ext cx="182880" cy="182880"/>
           </a:xfrm>
           <a:prstGeom prst="ellipse">
@@ -12125,8 +12130,8 @@
         </p:nvSpPr>
         <p:spPr>
           <a:xfrm>
-            <a:off x="1600199" y="2148840"/>
-            <a:ext cx="1463040" cy="685800"/>
+            <a:off x="1444752" y="2148840"/>
+            <a:ext cx="1298448" cy="685800"/>
           </a:xfrm>
           <a:prstGeom prst="rect">
             <a:avLst/>
@@ -12164,8 +12169,8 @@
         </p:nvSpPr>
         <p:spPr>
           <a:xfrm>
-            <a:off x="1600199" y="3291840"/>
-            <a:ext cx="1463040" cy="548640"/>
+            <a:off x="1444752" y="3291840"/>
+            <a:ext cx="1298448" cy="548640"/>
           </a:xfrm>
           <a:prstGeom prst="rect">
             <a:avLst/>
@@ -12203,7 +12208,7 @@
         </p:nvSpPr>
         <p:spPr>
           <a:xfrm>
-            <a:off x="3749040" y="2926080"/>
+            <a:off x="3337560" y="2926080"/>
             <a:ext cx="182880" cy="182880"/>
           </a:xfrm>
           <a:prstGeom prst="ellipse">
@@ -12246,8 +12251,8 @@
         </p:nvSpPr>
         <p:spPr>
           <a:xfrm>
-            <a:off x="3108960" y="2148840"/>
-            <a:ext cx="1463040" cy="685800"/>
+            <a:off x="2779776" y="2148840"/>
+            <a:ext cx="1298448" cy="685800"/>
           </a:xfrm>
           <a:prstGeom prst="rect">
             <a:avLst/>
@@ -12285,8 +12290,8 @@
         </p:nvSpPr>
         <p:spPr>
           <a:xfrm>
-            <a:off x="3108960" y="3291840"/>
-            <a:ext cx="1463040" cy="548640"/>
+            <a:off x="2779776" y="3291840"/>
+            <a:ext cx="1298448" cy="548640"/>
           </a:xfrm>
           <a:prstGeom prst="rect">
             <a:avLst/>
@@ -12324,7 +12329,7 @@
         </p:nvSpPr>
         <p:spPr>
           <a:xfrm>
-            <a:off x="5257800" y="2926080"/>
+            <a:off x="4672584" y="2926080"/>
             <a:ext cx="182880" cy="182880"/>
           </a:xfrm>
           <a:prstGeom prst="ellipse">
@@ -12367,8 +12372,8 @@
         </p:nvSpPr>
         <p:spPr>
           <a:xfrm>
-            <a:off x="4617720" y="2148840"/>
-            <a:ext cx="1463040" cy="685800"/>
+            <a:off x="4114800" y="2148840"/>
+            <a:ext cx="1298448" cy="685800"/>
           </a:xfrm>
           <a:prstGeom prst="rect">
             <a:avLst/>
@@ -12406,8 +12411,8 @@
         </p:nvSpPr>
         <p:spPr>
           <a:xfrm>
-            <a:off x="4617720" y="3291840"/>
-            <a:ext cx="1463040" cy="548640"/>
+            <a:off x="4114800" y="3291840"/>
+            <a:ext cx="1298448" cy="548640"/>
           </a:xfrm>
           <a:prstGeom prst="rect">
             <a:avLst/>
@@ -12445,7 +12450,7 @@
         </p:nvSpPr>
         <p:spPr>
           <a:xfrm>
-            <a:off x="6766560" y="2926080"/>
+            <a:off x="6007608" y="2926080"/>
             <a:ext cx="182880" cy="182880"/>
           </a:xfrm>
           <a:prstGeom prst="ellipse">
@@ -12488,8 +12493,8 @@
         </p:nvSpPr>
         <p:spPr>
           <a:xfrm>
-            <a:off x="6126480" y="2148840"/>
-            <a:ext cx="1463040" cy="685800"/>
+            <a:off x="5449824" y="2148840"/>
+            <a:ext cx="1298448" cy="685800"/>
           </a:xfrm>
           <a:prstGeom prst="rect">
             <a:avLst/>
@@ -12527,8 +12532,8 @@
         </p:nvSpPr>
         <p:spPr>
           <a:xfrm>
-            <a:off x="6126480" y="3291840"/>
-            <a:ext cx="1463040" cy="548640"/>
+            <a:off x="5449824" y="3291840"/>
+            <a:ext cx="1298448" cy="548640"/>
           </a:xfrm>
           <a:prstGeom prst="rect">
             <a:avLst/>
@@ -12566,7 +12571,7 @@
         </p:nvSpPr>
         <p:spPr>
           <a:xfrm>
-            <a:off x="8275319" y="2926080"/>
+            <a:off x="7342631" y="2926080"/>
             <a:ext cx="182880" cy="182880"/>
           </a:xfrm>
           <a:prstGeom prst="ellipse">
@@ -12609,8 +12614,8 @@
         </p:nvSpPr>
         <p:spPr>
           <a:xfrm>
-            <a:off x="7635239" y="2148840"/>
-            <a:ext cx="1463040" cy="685800"/>
+            <a:off x="6784848" y="2148840"/>
+            <a:ext cx="1298448" cy="685800"/>
           </a:xfrm>
           <a:prstGeom prst="rect">
             <a:avLst/>
@@ -12648,8 +12653,8 @@
         </p:nvSpPr>
         <p:spPr>
           <a:xfrm>
-            <a:off x="7635239" y="3291840"/>
-            <a:ext cx="1463040" cy="548640"/>
+            <a:off x="6784848" y="3291840"/>
+            <a:ext cx="1298448" cy="548640"/>
           </a:xfrm>
           <a:prstGeom prst="rect">
             <a:avLst/>
@@ -12687,7 +12692,7 @@
         </p:nvSpPr>
         <p:spPr>
           <a:xfrm>
-            <a:off x="9784080" y="2926080"/>
+            <a:off x="8677656" y="2926080"/>
             <a:ext cx="182880" cy="182880"/>
           </a:xfrm>
           <a:prstGeom prst="ellipse">
@@ -12730,8 +12735,8 @@
         </p:nvSpPr>
         <p:spPr>
           <a:xfrm>
-            <a:off x="9144000" y="2148840"/>
-            <a:ext cx="1463040" cy="685800"/>
+            <a:off x="8119871" y="2148840"/>
+            <a:ext cx="1298448" cy="685800"/>
           </a:xfrm>
           <a:prstGeom prst="rect">
             <a:avLst/>
@@ -12769,8 +12774,8 @@
         </p:nvSpPr>
         <p:spPr>
           <a:xfrm>
-            <a:off x="9144000" y="3291840"/>
-            <a:ext cx="1463040" cy="548640"/>
+            <a:off x="8119871" y="3291840"/>
+            <a:ext cx="1298448" cy="548640"/>
           </a:xfrm>
           <a:prstGeom prst="rect">
             <a:avLst/>
@@ -12808,7 +12813,7 @@
         </p:nvSpPr>
         <p:spPr>
           <a:xfrm>
-            <a:off x="11292840" y="2926080"/>
+            <a:off x="11347703" y="2926080"/>
             <a:ext cx="182880" cy="182880"/>
           </a:xfrm>
           <a:prstGeom prst="ellipse">
@@ -12851,8 +12856,8 @@
         </p:nvSpPr>
         <p:spPr>
           <a:xfrm>
-            <a:off x="10652759" y="2148840"/>
-            <a:ext cx="1463040" cy="685800"/>
+            <a:off x="10789919" y="2148840"/>
+            <a:ext cx="1298448" cy="685800"/>
           </a:xfrm>
           <a:prstGeom prst="rect">
             <a:avLst/>
@@ -12890,8 +12895,8 @@
         </p:nvSpPr>
         <p:spPr>
           <a:xfrm>
-            <a:off x="10652759" y="3291840"/>
-            <a:ext cx="1463040" cy="548640"/>
+            <a:off x="10789919" y="3291840"/>
+            <a:ext cx="1298448" cy="548640"/>
           </a:xfrm>
           <a:prstGeom prst="rect">
             <a:avLst/>
@@ -13002,6 +13007,127 @@
                 <a:latin typeface="Arial"/>
               </a:rPr>
               <a:t>На семинаре всё проверяем симуляциями: ЗБЧ, σ/√n, Чебышёв, ddof, корреляции на реальных данных.</a:t>
+            </a:r>
+          </a:p>
+        </p:txBody>
+      </p:sp>
+      <p:sp>
+        <p:nvSpPr>
+          <p:cNvPr id="53" name="Oval 44"/>
+          <p:cNvSpPr/>
+          <p:nvPr/>
+        </p:nvSpPr>
+        <p:spPr>
+          <a:xfrm>
+            <a:off x="10012679" y="2926080"/>
+            <a:ext cx="182880" cy="182880"/>
+          </a:xfrm>
+          <a:prstGeom prst="ellipse">
+            <a:avLst/>
+          </a:prstGeom>
+          <a:solidFill>
+            <a:srgbClr val="1F2937"/>
+          </a:solidFill>
+          <a:ln>
+            <a:noFill/>
+          </a:ln>
+        </p:spPr>
+        <p:style>
+          <a:lnRef idx="1">
+            <a:schemeClr val="accent1"/>
+          </a:lnRef>
+          <a:fillRef idx="3">
+            <a:schemeClr val="accent1"/>
+          </a:fillRef>
+          <a:effectRef idx="2">
+            <a:schemeClr val="accent1"/>
+          </a:effectRef>
+          <a:fontRef idx="minor">
+            <a:schemeClr val="lt1"/>
+          </a:fontRef>
+        </p:style>
+        <p:txBody>
+          <a:bodyPr rtlCol="0" anchor="ctr"/>
+          <a:lstStyle/>
+          <a:p>
+            <a:pPr algn="ctr"/>
+          </a:p>
+        </p:txBody>
+      </p:sp>
+      <p:sp>
+        <p:nvSpPr>
+          <p:cNvPr id="54" name="TextBox 45"/>
+          <p:cNvSpPr txBox="1"/>
+          <p:nvPr/>
+        </p:nvSpPr>
+        <p:spPr>
+          <a:xfrm>
+            <a:off x="9454895" y="2148840"/>
+            <a:ext cx="1298448" cy="685800"/>
+          </a:xfrm>
+          <a:prstGeom prst="rect">
+            <a:avLst/>
+          </a:prstGeom>
+          <a:noFill/>
+        </p:spPr>
+        <p:txBody>
+          <a:bodyPr wrap="square" lIns="0" rIns="0" tIns="0" bIns="0" anchor="b">
+            <a:spAutoFit/>
+          </a:bodyPr>
+          <a:lstStyle/>
+          <a:p>
+            <a:pPr algn="ctr">
+              <a:spcAft>
+                <a:spcPts val="400"/>
+              </a:spcAft>
+            </a:pPr>
+            <a:r>
+              <a:rPr sz="1400" b="1">
+                <a:solidFill>
+                  <a:srgbClr val="1F2937"/>
+                </a:solidFill>
+                <a:latin typeface="Arial"/>
+              </a:rPr>
+              <a:t>Факторы</a:t>
+            </a:r>
+          </a:p>
+        </p:txBody>
+      </p:sp>
+      <p:sp>
+        <p:nvSpPr>
+          <p:cNvPr id="55" name="TextBox 46"/>
+          <p:cNvSpPr txBox="1"/>
+          <p:nvPr/>
+        </p:nvSpPr>
+        <p:spPr>
+          <a:xfrm>
+            <a:off x="9454895" y="3291840"/>
+            <a:ext cx="1298448" cy="548640"/>
+          </a:xfrm>
+          <a:prstGeom prst="rect">
+            <a:avLst/>
+          </a:prstGeom>
+          <a:noFill/>
+        </p:spPr>
+        <p:txBody>
+          <a:bodyPr wrap="square" lIns="0" rIns="0" tIns="0" bIns="0" anchor="t">
+            <a:spAutoFit/>
+          </a:bodyPr>
+          <a:lstStyle/>
+          <a:p>
+            <a:pPr algn="ctr">
+              <a:spcAft>
+                <a:spcPts val="400"/>
+              </a:spcAft>
+            </a:pPr>
+            <a:r>
+              <a:rPr sz="1200" b="0">
+                <a:solidFill>
+                  <a:srgbClr val="6B7280"/>
+                </a:solidFill>
+                <a:latin typeface="Arial"/>
+              </a:rPr>
+              <a:t>скрытые причины</a:t>
             </a:r>
           </a:p>
         </p:txBody>
@@ -18923,7 +19049,7 @@
         </p:nvSpPr>
         <p:spPr>
           <a:xfrm>
-            <a:off x="548640" y="1325880"/>
+            <a:off x="548640" y="1280160"/>
             <a:ext cx="109728" cy="457200"/>
           </a:xfrm>
           <a:prstGeom prst="rect">
@@ -18969,7 +19095,7 @@
         </p:nvSpPr>
         <p:spPr>
           <a:xfrm>
-            <a:off x="868680" y="1325880"/>
+            <a:off x="868680" y="1280160"/>
             <a:ext cx="10698480" cy="457200"/>
           </a:xfrm>
           <a:prstGeom prst="rect">
@@ -19008,7 +19134,7 @@
         </p:nvSpPr>
         <p:spPr>
           <a:xfrm>
-            <a:off x="548640" y="1929384"/>
+            <a:off x="548640" y="1828800"/>
             <a:ext cx="109728" cy="457200"/>
           </a:xfrm>
           <a:prstGeom prst="rect">
@@ -19054,7 +19180,7 @@
         </p:nvSpPr>
         <p:spPr>
           <a:xfrm>
-            <a:off x="868680" y="1929384"/>
+            <a:off x="868680" y="1828800"/>
             <a:ext cx="10698480" cy="457200"/>
           </a:xfrm>
           <a:prstGeom prst="rect">
@@ -19093,7 +19219,7 @@
         </p:nvSpPr>
         <p:spPr>
           <a:xfrm>
-            <a:off x="548640" y="2532888"/>
+            <a:off x="548640" y="2377440"/>
             <a:ext cx="109728" cy="457200"/>
           </a:xfrm>
           <a:prstGeom prst="rect">
@@ -19139,7 +19265,7 @@
         </p:nvSpPr>
         <p:spPr>
           <a:xfrm>
-            <a:off x="868680" y="2532888"/>
+            <a:off x="868680" y="2377440"/>
             <a:ext cx="10698480" cy="457200"/>
           </a:xfrm>
           <a:prstGeom prst="rect">
@@ -19178,7 +19304,7 @@
         </p:nvSpPr>
         <p:spPr>
           <a:xfrm>
-            <a:off x="548640" y="3136391"/>
+            <a:off x="548640" y="2926080"/>
             <a:ext cx="109728" cy="457200"/>
           </a:xfrm>
           <a:prstGeom prst="rect">
@@ -19224,7 +19350,7 @@
         </p:nvSpPr>
         <p:spPr>
           <a:xfrm>
-            <a:off x="868680" y="3136391"/>
+            <a:off x="868680" y="2926080"/>
             <a:ext cx="10698480" cy="457200"/>
           </a:xfrm>
           <a:prstGeom prst="rect">
@@ -19263,7 +19389,7 @@
         </p:nvSpPr>
         <p:spPr>
           <a:xfrm>
-            <a:off x="548640" y="3739896"/>
+            <a:off x="548640" y="3474720"/>
             <a:ext cx="109728" cy="457200"/>
           </a:xfrm>
           <a:prstGeom prst="rect">
@@ -19309,7 +19435,7 @@
         </p:nvSpPr>
         <p:spPr>
           <a:xfrm>
-            <a:off x="868680" y="3739896"/>
+            <a:off x="868680" y="3474720"/>
             <a:ext cx="10698480" cy="457200"/>
           </a:xfrm>
           <a:prstGeom prst="rect">
@@ -19348,7 +19474,7 @@
         </p:nvSpPr>
         <p:spPr>
           <a:xfrm>
-            <a:off x="548640" y="4343400"/>
+            <a:off x="548640" y="4023360"/>
             <a:ext cx="109728" cy="457200"/>
           </a:xfrm>
           <a:prstGeom prst="rect">
@@ -19394,7 +19520,7 @@
         </p:nvSpPr>
         <p:spPr>
           <a:xfrm>
-            <a:off x="868680" y="4343400"/>
+            <a:off x="868680" y="4023360"/>
             <a:ext cx="10698480" cy="457200"/>
           </a:xfrm>
           <a:prstGeom prst="rect">
@@ -19433,7 +19559,7 @@
         </p:nvSpPr>
         <p:spPr>
           <a:xfrm>
-            <a:off x="548640" y="4946904"/>
+            <a:off x="548640" y="4572000"/>
             <a:ext cx="109728" cy="457200"/>
           </a:xfrm>
           <a:prstGeom prst="rect">
@@ -19479,7 +19605,7 @@
         </p:nvSpPr>
         <p:spPr>
           <a:xfrm>
-            <a:off x="868680" y="4946904"/>
+            <a:off x="868680" y="4572000"/>
             <a:ext cx="10698480" cy="457200"/>
           </a:xfrm>
           <a:prstGeom prst="rect">
@@ -19506,6 +19632,91 @@
                 <a:latin typeface="Arial"/>
               </a:rPr>
               <a:t>ρ ∈ [−1; 1] измеряет только линейную связь и не означает причинность.</a:t>
+            </a:r>
+          </a:p>
+        </p:txBody>
+      </p:sp>
+      <p:sp>
+        <p:nvSpPr>
+          <p:cNvPr id="40" name="Rectangle 37"/>
+          <p:cNvSpPr/>
+          <p:nvPr/>
+        </p:nvSpPr>
+        <p:spPr>
+          <a:xfrm>
+            <a:off x="548640" y="5120640"/>
+            <a:ext cx="109728" cy="457200"/>
+          </a:xfrm>
+          <a:prstGeom prst="rect">
+            <a:avLst/>
+          </a:prstGeom>
+          <a:solidFill>
+            <a:srgbClr val="3B82F6"/>
+          </a:solidFill>
+          <a:ln w="6350">
+            <a:solidFill>
+              <a:srgbClr val="3B82F6"/>
+            </a:solidFill>
+          </a:ln>
+          <a:effectLst/>
+        </p:spPr>
+        <p:style>
+          <a:lnRef idx="1">
+            <a:schemeClr val="accent1"/>
+          </a:lnRef>
+          <a:fillRef idx="3">
+            <a:schemeClr val="accent1"/>
+          </a:fillRef>
+          <a:effectRef idx="2">
+            <a:schemeClr val="accent1"/>
+          </a:effectRef>
+          <a:fontRef idx="minor">
+            <a:schemeClr val="lt1"/>
+          </a:fontRef>
+        </p:style>
+        <p:txBody>
+          <a:bodyPr rtlCol="0" anchor="ctr"/>
+          <a:lstStyle/>
+          <a:p>
+            <a:pPr algn="ctr"/>
+          </a:p>
+        </p:txBody>
+      </p:sp>
+      <p:sp>
+        <p:nvSpPr>
+          <p:cNvPr id="41" name="TextBox 38"/>
+          <p:cNvSpPr txBox="1"/>
+          <p:nvPr/>
+        </p:nvSpPr>
+        <p:spPr>
+          <a:xfrm>
+            <a:off x="868680" y="5120640"/>
+            <a:ext cx="10698480" cy="457200"/>
+          </a:xfrm>
+          <a:prstGeom prst="rect">
+            <a:avLst/>
+          </a:prstGeom>
+          <a:noFill/>
+        </p:spPr>
+        <p:txBody>
+          <a:bodyPr wrap="square" lIns="0" rIns="0" tIns="0" bIns="0" anchor="ctr">
+            <a:spAutoFit/>
+          </a:bodyPr>
+          <a:lstStyle/>
+          <a:p>
+            <a:pPr>
+              <a:spcAft>
+                <a:spcPts val="400"/>
+              </a:spcAft>
+            </a:pPr>
+            <a:r>
+              <a:rPr sz="1700" b="0">
+                <a:solidFill>
+                  <a:srgbClr val="1F2937"/>
+                </a:solidFill>
+                <a:latin typeface="Arial"/>
+              </a:rPr>
+              <a:t>Факторный анализ: R = ΛΛᵀ + Ψ; нагрузка — корреляция признака с фактором; поворот не меняет R.</a:t>
             </a:r>
           </a:p>
         </p:txBody>
@@ -19653,7 +19864,7 @@
                 </a:solidFill>
                 <a:latin typeface="Arial"/>
               </a:rPr>
-              <a:t>Мёрфи К. П. Вероятностное машинное обучение: введение — разд. 2.2.5, 2.8.4, 3.1, 4.7.6</a:t>
+              <a:t>Мёрфи К. П. Вероятностное машинное обучение: введение — разд. 2.2.5, 2.8.4, 3.1, 4.7.6, 20.2</a:t>
             </a:r>
           </a:p>
           <a:p>
@@ -19725,6 +19936,2564 @@
                 <a:latin typeface="Arial"/>
               </a:rPr>
               <a:t>Конспект с полными формулировками и доказательствами: 04_expectation-variance-itmo.md</a:t>
+            </a:r>
+          </a:p>
+        </p:txBody>
+      </p:sp>
+    </p:spTree>
+  </p:cSld>
+  <p:clrMapOvr>
+    <a:masterClrMapping/>
+  </p:clrMapOvr>
+</p:sld>
+</file>
+
+<file path=ppt/slides/slide42.xml><?xml version="1.0" encoding="utf-8"?>
+<p:sld xmlns:a="http://schemas.openxmlformats.org/drawingml/2006/main" xmlns:p="http://schemas.openxmlformats.org/presentationml/2006/main" xmlns:r="http://schemas.openxmlformats.org/officeDocument/2006/relationships">
+  <p:cSld>
+    <p:spTree>
+      <p:nvGrpSpPr>
+        <p:cNvPr id="1" name=""/>
+        <p:cNvGrpSpPr/>
+        <p:nvPr/>
+      </p:nvGrpSpPr>
+      <p:grpSpPr/>
+      <p:sp>
+        <p:nvSpPr>
+          <p:cNvPr id="2" name="Title 1"/>
+          <p:cNvSpPr>
+            <a:spLocks noGrp="1"/>
+          </p:cNvSpPr>
+          <p:nvPr>
+            <p:ph type="title" idx="100"/>
+          </p:nvPr>
+        </p:nvSpPr>
+        <p:spPr/>
+        <p:txBody>
+          <a:bodyPr/>
+          <a:lstStyle/>
+          <a:p>
+            <a:r>
+              <a:rPr sz="3600" b="1">
+                <a:solidFill>
+                  <a:srgbClr val="1F2937"/>
+                </a:solidFill>
+                <a:latin typeface="Arial"/>
+              </a:rPr>
+              <a:t>Факторный анализ</a:t>
+            </a:r>
+          </a:p>
+        </p:txBody>
+      </p:sp>
+      <p:sp>
+        <p:nvSpPr>
+          <p:cNvPr id="3" name="TextBox 2"/>
+          <p:cNvSpPr txBox="1"/>
+          <p:nvPr/>
+        </p:nvSpPr>
+        <p:spPr>
+          <a:xfrm>
+            <a:off x="548640" y="3794760"/>
+            <a:ext cx="8229600" cy="548640"/>
+          </a:xfrm>
+          <a:prstGeom prst="rect">
+            <a:avLst/>
+          </a:prstGeom>
+          <a:noFill/>
+        </p:spPr>
+        <p:txBody>
+          <a:bodyPr wrap="square" lIns="0" rIns="0" tIns="0" bIns="0" anchor="t">
+            <a:spAutoFit/>
+          </a:bodyPr>
+          <a:lstStyle/>
+          <a:p>
+            <a:pPr>
+              <a:spcAft>
+                <a:spcPts val="400"/>
+              </a:spcAft>
+            </a:pPr>
+            <a:r>
+              <a:rPr sz="1800" b="0">
+                <a:solidFill>
+                  <a:srgbClr val="6B7280"/>
+                </a:solidFill>
+                <a:latin typeface="Arial"/>
+              </a:rPr>
+              <a:t>Скрытые причины корреляций</a:t>
+            </a:r>
+          </a:p>
+        </p:txBody>
+      </p:sp>
+    </p:spTree>
+  </p:cSld>
+  <p:clrMapOvr>
+    <a:masterClrMapping/>
+  </p:clrMapOvr>
+</p:sld>
+</file>
+
+<file path=ppt/slides/slide43.xml><?xml version="1.0" encoding="utf-8"?>
+<p:sld xmlns:a="http://schemas.openxmlformats.org/drawingml/2006/main" xmlns:p="http://schemas.openxmlformats.org/presentationml/2006/main" xmlns:r="http://schemas.openxmlformats.org/officeDocument/2006/relationships">
+  <p:cSld>
+    <p:spTree>
+      <p:nvGrpSpPr>
+        <p:cNvPr id="1" name=""/>
+        <p:cNvGrpSpPr/>
+        <p:nvPr/>
+      </p:nvGrpSpPr>
+      <p:grpSpPr/>
+      <p:sp>
+        <p:nvSpPr>
+          <p:cNvPr id="2" name="Title 1"/>
+          <p:cNvSpPr>
+            <a:spLocks noGrp="1"/>
+          </p:cNvSpPr>
+          <p:nvPr>
+            <p:ph type="title" idx="101"/>
+          </p:nvPr>
+        </p:nvSpPr>
+        <p:spPr/>
+        <p:txBody>
+          <a:bodyPr/>
+          <a:lstStyle/>
+          <a:p>
+            <a:r>
+              <a:rPr sz="2600" b="1">
+                <a:solidFill>
+                  <a:srgbClr val="1F2937"/>
+                </a:solidFill>
+                <a:latin typeface="Arial"/>
+              </a:rPr>
+              <a:t>Идея: корреляции из-за скрытых факторов</a:t>
+            </a:r>
+          </a:p>
+        </p:txBody>
+      </p:sp>
+      <p:sp>
+        <p:nvSpPr>
+          <p:cNvPr id="3" name="Slide Number Placeholder 0"/>
+          <p:cNvSpPr>
+            <a:spLocks noGrp="1"/>
+          </p:cNvSpPr>
+          <p:nvPr>
+            <p:ph type="sldNum" sz="quarter" idx="4294967295"/>
+          </p:nvPr>
+        </p:nvSpPr>
+        <p:spPr>
+          <a:xfrm>
+            <a:off x="11368735" y="6400800"/>
+            <a:ext cx="457200" cy="274320"/>
+          </a:xfrm>
+          <a:prstGeom prst="rect">
+            <a:avLst/>
+          </a:prstGeom>
+          <a:extLst>
+            <a:ext uri="{C572A759-6A51-4108-AA02-DFA0A04FC94B}">
+              <ma14:wrappingTextBoxFlag xmlns:ma14="http://schemas.microsoft.com/office/mac/drawingml/2011/main" val="0"/>
+            </a:ext>
+          </a:extLst>
+        </p:spPr>
+        <p:txBody>
+          <a:bodyPr/>
+          <a:lstStyle>
+            <a:lvl1pPr>
+              <a:defRPr sz="1000">
+                <a:solidFill>
+                  <a:srgbClr val="6B7280"/>
+                </a:solidFill>
+                <a:latin typeface="Arial"/>
+                <a:ea typeface="Arial"/>
+                <a:cs typeface="Arial"/>
+              </a:defRPr>
+            </a:lvl1pPr>
+          </a:lstStyle>
+          <a:p>
+            <a:pPr algn="r"/>
+            <a:fld id="{F7021451-1387-4CA6-816F-3879F97B5CBC}" type="slidenum">
+              <a:rPr b="0" lang="en-US"/>
+              <a:t>2</a:t>
+            </a:fld>
+            <a:endParaRPr lang="en-US"/>
+          </a:p>
+        </p:txBody>
+      </p:sp>
+      <p:pic>
+        <p:nvPicPr>
+          <p:cNvPr id="4" name="Picture 3" descr="04-fa-corr.png"/>
+          <p:cNvPicPr>
+            <a:picLocks noChangeAspect="1"/>
+          </p:cNvPicPr>
+          <p:nvPr/>
+        </p:nvPicPr>
+        <p:blipFill>
+          <a:blip r:embed="rId2"/>
+          <a:stretch>
+            <a:fillRect/>
+          </a:stretch>
+        </p:blipFill>
+        <p:spPr>
+          <a:xfrm>
+            <a:off x="548640" y="1188720"/>
+            <a:ext cx="6949440" cy="3193998"/>
+          </a:xfrm>
+          <a:prstGeom prst="rect">
+            <a:avLst/>
+          </a:prstGeom>
+        </p:spPr>
+      </p:pic>
+      <p:sp>
+        <p:nvSpPr>
+          <p:cNvPr id="5" name="Rectangle 4"/>
+          <p:cNvSpPr/>
+          <p:nvPr/>
+        </p:nvSpPr>
+        <p:spPr>
+          <a:xfrm>
+            <a:off x="7726679" y="1280160"/>
+            <a:ext cx="3913632" cy="1874519"/>
+          </a:xfrm>
+          <a:prstGeom prst="rect">
+            <a:avLst/>
+          </a:prstGeom>
+          <a:solidFill>
+            <a:srgbClr val="D6EEF8"/>
+          </a:solidFill>
+          <a:ln w="6350">
+            <a:solidFill>
+              <a:srgbClr val="D6EEF8"/>
+            </a:solidFill>
+          </a:ln>
+          <a:effectLst/>
+        </p:spPr>
+        <p:style>
+          <a:lnRef idx="1">
+            <a:schemeClr val="accent1"/>
+          </a:lnRef>
+          <a:fillRef idx="3">
+            <a:schemeClr val="accent1"/>
+          </a:fillRef>
+          <a:effectRef idx="2">
+            <a:schemeClr val="accent1"/>
+          </a:effectRef>
+          <a:fontRef idx="minor">
+            <a:schemeClr val="lt1"/>
+          </a:fontRef>
+        </p:style>
+        <p:txBody>
+          <a:bodyPr rtlCol="0" anchor="ctr"/>
+          <a:lstStyle/>
+          <a:p>
+            <a:pPr algn="ctr"/>
+          </a:p>
+        </p:txBody>
+      </p:sp>
+      <p:sp>
+        <p:nvSpPr>
+          <p:cNvPr id="6" name="TextBox 5"/>
+          <p:cNvSpPr txBox="1"/>
+          <p:nvPr/>
+        </p:nvSpPr>
+        <p:spPr>
+          <a:xfrm>
+            <a:off x="7955279" y="1463039"/>
+            <a:ext cx="3456432" cy="365760"/>
+          </a:xfrm>
+          <a:prstGeom prst="rect">
+            <a:avLst/>
+          </a:prstGeom>
+          <a:noFill/>
+        </p:spPr>
+        <p:txBody>
+          <a:bodyPr wrap="square" lIns="0" rIns="0" tIns="0" bIns="0" anchor="t">
+            <a:spAutoFit/>
+          </a:bodyPr>
+          <a:lstStyle/>
+          <a:p>
+            <a:pPr>
+              <a:spcAft>
+                <a:spcPts val="400"/>
+              </a:spcAft>
+            </a:pPr>
+            <a:r>
+              <a:rPr sz="1500" b="1">
+                <a:solidFill>
+                  <a:srgbClr val="1F2937"/>
+                </a:solidFill>
+                <a:latin typeface="Arial"/>
+              </a:rPr>
+              <a:t>Спирмен, 1904</a:t>
+            </a:r>
+          </a:p>
+        </p:txBody>
+      </p:sp>
+      <p:sp>
+        <p:nvSpPr>
+          <p:cNvPr id="7" name="TextBox 6"/>
+          <p:cNvSpPr txBox="1"/>
+          <p:nvPr/>
+        </p:nvSpPr>
+        <p:spPr>
+          <a:xfrm>
+            <a:off x="7955279" y="1847088"/>
+            <a:ext cx="3456432" cy="1188719"/>
+          </a:xfrm>
+          <a:prstGeom prst="rect">
+            <a:avLst/>
+          </a:prstGeom>
+          <a:noFill/>
+        </p:spPr>
+        <p:txBody>
+          <a:bodyPr wrap="square" lIns="0" rIns="0" tIns="0" bIns="0" anchor="t">
+            <a:spAutoFit/>
+          </a:bodyPr>
+          <a:lstStyle/>
+          <a:p>
+            <a:pPr>
+              <a:spcAft>
+                <a:spcPts val="400"/>
+              </a:spcAft>
+            </a:pPr>
+            <a:r>
+              <a:rPr sz="1300" b="0">
+                <a:solidFill>
+                  <a:srgbClr val="1F2937"/>
+                </a:solidFill>
+                <a:latin typeface="Arial"/>
+              </a:rPr>
+              <a:t>Оценки по разным предметам коррелированы. Гипотеза: за ними стоят несколько скрытых способностей.</a:t>
+            </a:r>
+          </a:p>
+        </p:txBody>
+      </p:sp>
+      <p:sp>
+        <p:nvSpPr>
+          <p:cNvPr id="8" name="Rectangle 7"/>
+          <p:cNvSpPr/>
+          <p:nvPr/>
+        </p:nvSpPr>
+        <p:spPr>
+          <a:xfrm>
+            <a:off x="7726679" y="3291840"/>
+            <a:ext cx="3913632" cy="1783080"/>
+          </a:xfrm>
+          <a:prstGeom prst="rect">
+            <a:avLst/>
+          </a:prstGeom>
+          <a:solidFill>
+            <a:srgbClr val="F5F7FA"/>
+          </a:solidFill>
+          <a:ln w="6350">
+            <a:solidFill>
+              <a:srgbClr val="D1D5DB"/>
+            </a:solidFill>
+          </a:ln>
+          <a:effectLst/>
+        </p:spPr>
+        <p:style>
+          <a:lnRef idx="1">
+            <a:schemeClr val="accent1"/>
+          </a:lnRef>
+          <a:fillRef idx="3">
+            <a:schemeClr val="accent1"/>
+          </a:fillRef>
+          <a:effectRef idx="2">
+            <a:schemeClr val="accent1"/>
+          </a:effectRef>
+          <a:fontRef idx="minor">
+            <a:schemeClr val="lt1"/>
+          </a:fontRef>
+        </p:style>
+        <p:txBody>
+          <a:bodyPr rtlCol="0" anchor="ctr"/>
+          <a:lstStyle/>
+          <a:p>
+            <a:pPr algn="ctr"/>
+          </a:p>
+        </p:txBody>
+      </p:sp>
+      <p:sp>
+        <p:nvSpPr>
+          <p:cNvPr id="9" name="TextBox 8"/>
+          <p:cNvSpPr txBox="1"/>
+          <p:nvPr/>
+        </p:nvSpPr>
+        <p:spPr>
+          <a:xfrm>
+            <a:off x="7955279" y="3474720"/>
+            <a:ext cx="3456432" cy="365760"/>
+          </a:xfrm>
+          <a:prstGeom prst="rect">
+            <a:avLst/>
+          </a:prstGeom>
+          <a:noFill/>
+        </p:spPr>
+        <p:txBody>
+          <a:bodyPr wrap="square" lIns="0" rIns="0" tIns="0" bIns="0" anchor="t">
+            <a:spAutoFit/>
+          </a:bodyPr>
+          <a:lstStyle/>
+          <a:p>
+            <a:pPr>
+              <a:spcAft>
+                <a:spcPts val="400"/>
+              </a:spcAft>
+            </a:pPr>
+            <a:r>
+              <a:rPr sz="1500" b="1">
+                <a:solidFill>
+                  <a:srgbClr val="1F2937"/>
+                </a:solidFill>
+                <a:latin typeface="Arial"/>
+              </a:rPr>
+              <a:t>Где применяют</a:t>
+            </a:r>
+          </a:p>
+        </p:txBody>
+      </p:sp>
+      <p:sp>
+        <p:nvSpPr>
+          <p:cNvPr id="10" name="TextBox 9"/>
+          <p:cNvSpPr txBox="1"/>
+          <p:nvPr/>
+        </p:nvSpPr>
+        <p:spPr>
+          <a:xfrm>
+            <a:off x="7955279" y="3858768"/>
+            <a:ext cx="3456432" cy="1097280"/>
+          </a:xfrm>
+          <a:prstGeom prst="rect">
+            <a:avLst/>
+          </a:prstGeom>
+          <a:noFill/>
+        </p:spPr>
+        <p:txBody>
+          <a:bodyPr wrap="square" lIns="0" rIns="0" tIns="0" bIns="0" anchor="t">
+            <a:spAutoFit/>
+          </a:bodyPr>
+          <a:lstStyle/>
+          <a:p>
+            <a:pPr>
+              <a:spcAft>
+                <a:spcPts val="400"/>
+              </a:spcAft>
+            </a:pPr>
+            <a:r>
+              <a:rPr sz="1300" b="0">
+                <a:solidFill>
+                  <a:srgbClr val="6B7280"/>
+                </a:solidFill>
+                <a:latin typeface="Arial"/>
+              </a:rPr>
+              <a:t>тесты личности и анкеты, маркетинговые опросы, доходности акций (рыночный и отраслевые факторы)</a:t>
+            </a:r>
+          </a:p>
+        </p:txBody>
+      </p:sp>
+      <p:sp>
+        <p:nvSpPr>
+          <p:cNvPr id="11" name="Rectangle 10"/>
+          <p:cNvSpPr/>
+          <p:nvPr/>
+        </p:nvSpPr>
+        <p:spPr>
+          <a:xfrm>
+            <a:off x="548640" y="5349240"/>
+            <a:ext cx="11094415" cy="457200"/>
+          </a:xfrm>
+          <a:prstGeom prst="rect">
+            <a:avLst/>
+          </a:prstGeom>
+          <a:solidFill>
+            <a:srgbClr val="D6EEF8"/>
+          </a:solidFill>
+          <a:ln w="6350">
+            <a:solidFill>
+              <a:srgbClr val="D6EEF8"/>
+            </a:solidFill>
+          </a:ln>
+          <a:effectLst/>
+        </p:spPr>
+        <p:style>
+          <a:lnRef idx="1">
+            <a:schemeClr val="accent1"/>
+          </a:lnRef>
+          <a:fillRef idx="3">
+            <a:schemeClr val="accent1"/>
+          </a:fillRef>
+          <a:effectRef idx="2">
+            <a:schemeClr val="accent1"/>
+          </a:effectRef>
+          <a:fontRef idx="minor">
+            <a:schemeClr val="lt1"/>
+          </a:fontRef>
+        </p:style>
+        <p:txBody>
+          <a:bodyPr rtlCol="0" anchor="ctr"/>
+          <a:lstStyle/>
+          <a:p>
+            <a:pPr algn="ctr"/>
+          </a:p>
+        </p:txBody>
+      </p:sp>
+      <p:sp>
+        <p:nvSpPr>
+          <p:cNvPr id="12" name="TextBox 11"/>
+          <p:cNvSpPr txBox="1"/>
+          <p:nvPr/>
+        </p:nvSpPr>
+        <p:spPr>
+          <a:xfrm>
+            <a:off x="777240" y="5349240"/>
+            <a:ext cx="10637215" cy="457200"/>
+          </a:xfrm>
+          <a:prstGeom prst="rect">
+            <a:avLst/>
+          </a:prstGeom>
+          <a:noFill/>
+        </p:spPr>
+        <p:txBody>
+          <a:bodyPr wrap="square" lIns="0" rIns="0" tIns="0" bIns="0" anchor="ctr">
+            <a:spAutoFit/>
+          </a:bodyPr>
+          <a:lstStyle/>
+          <a:p>
+            <a:pPr>
+              <a:spcAft>
+                <a:spcPts val="400"/>
+              </a:spcAft>
+            </a:pPr>
+            <a:r>
+              <a:rPr sz="1500" b="1">
+                <a:solidFill>
+                  <a:srgbClr val="1F2937"/>
+                </a:solidFill>
+                <a:latin typeface="Arial"/>
+              </a:rPr>
+              <a:t>6 контрольных, 800 школьников: два блока корреляций и два собственных числа больше 1 → два фактора.</a:t>
+            </a:r>
+          </a:p>
+        </p:txBody>
+      </p:sp>
+    </p:spTree>
+  </p:cSld>
+  <p:clrMapOvr>
+    <a:masterClrMapping/>
+  </p:clrMapOvr>
+</p:sld>
+</file>
+
+<file path=ppt/slides/slide44.xml><?xml version="1.0" encoding="utf-8"?>
+<p:sld xmlns:a="http://schemas.openxmlformats.org/drawingml/2006/main" xmlns:p="http://schemas.openxmlformats.org/presentationml/2006/main" xmlns:r="http://schemas.openxmlformats.org/officeDocument/2006/relationships">
+  <p:cSld>
+    <p:spTree>
+      <p:nvGrpSpPr>
+        <p:cNvPr id="1" name=""/>
+        <p:cNvGrpSpPr/>
+        <p:nvPr/>
+      </p:nvGrpSpPr>
+      <p:grpSpPr/>
+      <p:sp>
+        <p:nvSpPr>
+          <p:cNvPr id="2" name="Title 1"/>
+          <p:cNvSpPr>
+            <a:spLocks noGrp="1"/>
+          </p:cNvSpPr>
+          <p:nvPr>
+            <p:ph type="title" idx="101"/>
+          </p:nvPr>
+        </p:nvSpPr>
+        <p:spPr/>
+        <p:txBody>
+          <a:bodyPr/>
+          <a:lstStyle/>
+          <a:p>
+            <a:r>
+              <a:rPr sz="2600" b="1">
+                <a:solidFill>
+                  <a:srgbClr val="1F2937"/>
+                </a:solidFill>
+                <a:latin typeface="Arial"/>
+              </a:rPr>
+              <a:t>Модель факторного анализа</a:t>
+            </a:r>
+          </a:p>
+        </p:txBody>
+      </p:sp>
+      <p:sp>
+        <p:nvSpPr>
+          <p:cNvPr id="3" name="Slide Number Placeholder 0"/>
+          <p:cNvSpPr>
+            <a:spLocks noGrp="1"/>
+          </p:cNvSpPr>
+          <p:nvPr>
+            <p:ph type="sldNum" sz="quarter" idx="4294967295"/>
+          </p:nvPr>
+        </p:nvSpPr>
+        <p:spPr>
+          <a:xfrm>
+            <a:off x="11368735" y="6400800"/>
+            <a:ext cx="457200" cy="274320"/>
+          </a:xfrm>
+          <a:prstGeom prst="rect">
+            <a:avLst/>
+          </a:prstGeom>
+          <a:extLst>
+            <a:ext uri="{C572A759-6A51-4108-AA02-DFA0A04FC94B}">
+              <ma14:wrappingTextBoxFlag xmlns:ma14="http://schemas.microsoft.com/office/mac/drawingml/2011/main" val="0"/>
+            </a:ext>
+          </a:extLst>
+        </p:spPr>
+        <p:txBody>
+          <a:bodyPr/>
+          <a:lstStyle>
+            <a:lvl1pPr>
+              <a:defRPr sz="1000">
+                <a:solidFill>
+                  <a:srgbClr val="6B7280"/>
+                </a:solidFill>
+                <a:latin typeface="Arial"/>
+                <a:ea typeface="Arial"/>
+                <a:cs typeface="Arial"/>
+              </a:defRPr>
+            </a:lvl1pPr>
+          </a:lstStyle>
+          <a:p>
+            <a:pPr algn="r"/>
+            <a:fld id="{F7021451-1387-4CA6-816F-3879F97B5CBC}" type="slidenum">
+              <a:rPr b="0" lang="en-US"/>
+              <a:t>2</a:t>
+            </a:fld>
+            <a:endParaRPr lang="en-US"/>
+          </a:p>
+        </p:txBody>
+      </p:sp>
+      <p:pic>
+        <p:nvPicPr>
+          <p:cNvPr id="4" name="Picture 3" descr="f_06195f64e56bd88b.png"/>
+          <p:cNvPicPr>
+            <a:picLocks noChangeAspect="1"/>
+          </p:cNvPicPr>
+          <p:nvPr/>
+        </p:nvPicPr>
+        <p:blipFill>
+          <a:blip r:embed="rId2"/>
+          <a:stretch>
+            <a:fillRect/>
+          </a:stretch>
+        </p:blipFill>
+        <p:spPr>
+          <a:xfrm>
+            <a:off x="548640" y="1280160"/>
+            <a:ext cx="5172456" cy="545592"/>
+          </a:xfrm>
+          <a:prstGeom prst="rect">
+            <a:avLst/>
+          </a:prstGeom>
+        </p:spPr>
+      </p:pic>
+      <p:sp>
+        <p:nvSpPr>
+          <p:cNvPr id="5" name="TextBox 4"/>
+          <p:cNvSpPr txBox="1"/>
+          <p:nvPr/>
+        </p:nvSpPr>
+        <p:spPr>
+          <a:xfrm>
+            <a:off x="548640" y="2011680"/>
+            <a:ext cx="5669280" cy="914400"/>
+          </a:xfrm>
+          <a:prstGeom prst="rect">
+            <a:avLst/>
+          </a:prstGeom>
+          <a:noFill/>
+        </p:spPr>
+        <p:txBody>
+          <a:bodyPr wrap="square" lIns="0" rIns="0" tIns="0" bIns="0" anchor="t">
+            <a:spAutoFit/>
+          </a:bodyPr>
+          <a:lstStyle/>
+          <a:p>
+            <a:pPr>
+              <a:spcAft>
+                <a:spcPts val="400"/>
+              </a:spcAft>
+            </a:pPr>
+            <a:r>
+              <a:rPr sz="1300" b="0">
+                <a:solidFill>
+                  <a:srgbClr val="1F2937"/>
+                </a:solidFill>
+                <a:latin typeface="Arial"/>
+              </a:rPr>
+              <a:t>Xᵢ стандартизованы; общие факторы Fⱼ: E = 0, D = 1, некоррелированы; специфические εᵢ: D = ψᵢ, некоррелированы ни с чем.</a:t>
+            </a:r>
+          </a:p>
+        </p:txBody>
+      </p:sp>
+      <p:pic>
+        <p:nvPicPr>
+          <p:cNvPr id="6" name="Picture 5" descr="f_d862bba943adcf9d.png"/>
+          <p:cNvPicPr>
+            <a:picLocks noChangeAspect="1"/>
+          </p:cNvPicPr>
+          <p:nvPr/>
+        </p:nvPicPr>
+        <p:blipFill>
+          <a:blip r:embed="rId3"/>
+          <a:stretch>
+            <a:fillRect/>
+          </a:stretch>
+        </p:blipFill>
+        <p:spPr>
+          <a:xfrm>
+            <a:off x="548640" y="3108960"/>
+            <a:ext cx="4206240" cy="699540"/>
+          </a:xfrm>
+          <a:prstGeom prst="rect">
+            <a:avLst/>
+          </a:prstGeom>
+        </p:spPr>
+      </p:pic>
+      <p:pic>
+        <p:nvPicPr>
+          <p:cNvPr id="7" name="Picture 6" descr="f_c887e671585facd6.png"/>
+          <p:cNvPicPr>
+            <a:picLocks noChangeAspect="1"/>
+          </p:cNvPicPr>
+          <p:nvPr/>
+        </p:nvPicPr>
+        <p:blipFill>
+          <a:blip r:embed="rId4"/>
+          <a:stretch>
+            <a:fillRect/>
+          </a:stretch>
+        </p:blipFill>
+        <p:spPr>
+          <a:xfrm>
+            <a:off x="548640" y="4114800"/>
+            <a:ext cx="5669280" cy="712094"/>
+          </a:xfrm>
+          <a:prstGeom prst="rect">
+            <a:avLst/>
+          </a:prstGeom>
+        </p:spPr>
+      </p:pic>
+      <p:sp>
+        <p:nvSpPr>
+          <p:cNvPr id="8" name="Rectangle 7"/>
+          <p:cNvSpPr/>
+          <p:nvPr/>
+        </p:nvSpPr>
+        <p:spPr>
+          <a:xfrm>
+            <a:off x="6537960" y="1280160"/>
+            <a:ext cx="5102352" cy="1737360"/>
+          </a:xfrm>
+          <a:prstGeom prst="rect">
+            <a:avLst/>
+          </a:prstGeom>
+          <a:solidFill>
+            <a:srgbClr val="D6EEF8"/>
+          </a:solidFill>
+          <a:ln w="6350">
+            <a:solidFill>
+              <a:srgbClr val="D6EEF8"/>
+            </a:solidFill>
+          </a:ln>
+          <a:effectLst/>
+        </p:spPr>
+        <p:style>
+          <a:lnRef idx="1">
+            <a:schemeClr val="accent1"/>
+          </a:lnRef>
+          <a:fillRef idx="3">
+            <a:schemeClr val="accent1"/>
+          </a:fillRef>
+          <a:effectRef idx="2">
+            <a:schemeClr val="accent1"/>
+          </a:effectRef>
+          <a:fontRef idx="minor">
+            <a:schemeClr val="lt1"/>
+          </a:fontRef>
+        </p:style>
+        <p:txBody>
+          <a:bodyPr rtlCol="0" anchor="ctr"/>
+          <a:lstStyle/>
+          <a:p>
+            <a:pPr algn="ctr"/>
+          </a:p>
+        </p:txBody>
+      </p:sp>
+      <p:sp>
+        <p:nvSpPr>
+          <p:cNvPr id="9" name="TextBox 8"/>
+          <p:cNvSpPr txBox="1"/>
+          <p:nvPr/>
+        </p:nvSpPr>
+        <p:spPr>
+          <a:xfrm>
+            <a:off x="6766560" y="1463039"/>
+            <a:ext cx="4645152" cy="365760"/>
+          </a:xfrm>
+          <a:prstGeom prst="rect">
+            <a:avLst/>
+          </a:prstGeom>
+          <a:noFill/>
+        </p:spPr>
+        <p:txBody>
+          <a:bodyPr wrap="square" lIns="0" rIns="0" tIns="0" bIns="0" anchor="t">
+            <a:spAutoFit/>
+          </a:bodyPr>
+          <a:lstStyle/>
+          <a:p>
+            <a:pPr>
+              <a:spcAft>
+                <a:spcPts val="400"/>
+              </a:spcAft>
+            </a:pPr>
+            <a:r>
+              <a:rPr sz="1500" b="1">
+                <a:solidFill>
+                  <a:srgbClr val="1F2937"/>
+                </a:solidFill>
+                <a:latin typeface="Arial"/>
+              </a:rPr>
+              <a:t>Нагрузка = корреляция</a:t>
+            </a:r>
+          </a:p>
+        </p:txBody>
+      </p:sp>
+      <p:sp>
+        <p:nvSpPr>
+          <p:cNvPr id="10" name="TextBox 9"/>
+          <p:cNvSpPr txBox="1"/>
+          <p:nvPr/>
+        </p:nvSpPr>
+        <p:spPr>
+          <a:xfrm>
+            <a:off x="6766560" y="1847088"/>
+            <a:ext cx="4645152" cy="1051560"/>
+          </a:xfrm>
+          <a:prstGeom prst="rect">
+            <a:avLst/>
+          </a:prstGeom>
+          <a:noFill/>
+        </p:spPr>
+        <p:txBody>
+          <a:bodyPr wrap="square" lIns="0" rIns="0" tIns="0" bIns="0" anchor="t">
+            <a:spAutoFit/>
+          </a:bodyPr>
+          <a:lstStyle/>
+          <a:p>
+            <a:pPr>
+              <a:spcAft>
+                <a:spcPts val="400"/>
+              </a:spcAft>
+            </a:pPr>
+            <a:r>
+              <a:rPr sz="1300" b="0">
+                <a:solidFill>
+                  <a:srgbClr val="1F2937"/>
+                </a:solidFill>
+                <a:latin typeface="Arial"/>
+              </a:rPr>
+              <a:t>cov(Xᵢ, Fⱼ) = λᵢⱼ, дисперсии равны 1, значит λᵢⱼ = ρ(Xᵢ, Fⱼ). Общность h² — доля дисперсии, объяснённая факторами.</a:t>
+            </a:r>
+          </a:p>
+        </p:txBody>
+      </p:sp>
+      <p:sp>
+        <p:nvSpPr>
+          <p:cNvPr id="11" name="Rectangle 10"/>
+          <p:cNvSpPr/>
+          <p:nvPr/>
+        </p:nvSpPr>
+        <p:spPr>
+          <a:xfrm>
+            <a:off x="6537960" y="3154680"/>
+            <a:ext cx="5102352" cy="1920240"/>
+          </a:xfrm>
+          <a:prstGeom prst="rect">
+            <a:avLst/>
+          </a:prstGeom>
+          <a:solidFill>
+            <a:srgbClr val="F5F7FA"/>
+          </a:solidFill>
+          <a:ln w="6350">
+            <a:solidFill>
+              <a:srgbClr val="D1D5DB"/>
+            </a:solidFill>
+          </a:ln>
+          <a:effectLst/>
+        </p:spPr>
+        <p:style>
+          <a:lnRef idx="1">
+            <a:schemeClr val="accent1"/>
+          </a:lnRef>
+          <a:fillRef idx="3">
+            <a:schemeClr val="accent1"/>
+          </a:fillRef>
+          <a:effectRef idx="2">
+            <a:schemeClr val="accent1"/>
+          </a:effectRef>
+          <a:fontRef idx="minor">
+            <a:schemeClr val="lt1"/>
+          </a:fontRef>
+        </p:style>
+        <p:txBody>
+          <a:bodyPr rtlCol="0" anchor="ctr"/>
+          <a:lstStyle/>
+          <a:p>
+            <a:pPr algn="ctr"/>
+          </a:p>
+        </p:txBody>
+      </p:sp>
+      <p:sp>
+        <p:nvSpPr>
+          <p:cNvPr id="12" name="TextBox 11"/>
+          <p:cNvSpPr txBox="1"/>
+          <p:nvPr/>
+        </p:nvSpPr>
+        <p:spPr>
+          <a:xfrm>
+            <a:off x="6766560" y="3337560"/>
+            <a:ext cx="4645152" cy="365760"/>
+          </a:xfrm>
+          <a:prstGeom prst="rect">
+            <a:avLst/>
+          </a:prstGeom>
+          <a:noFill/>
+        </p:spPr>
+        <p:txBody>
+          <a:bodyPr wrap="square" lIns="0" rIns="0" tIns="0" bIns="0" anchor="t">
+            <a:spAutoFit/>
+          </a:bodyPr>
+          <a:lstStyle/>
+          <a:p>
+            <a:pPr>
+              <a:spcAft>
+                <a:spcPts val="400"/>
+              </a:spcAft>
+            </a:pPr>
+            <a:r>
+              <a:rPr sz="1500" b="1">
+                <a:solidFill>
+                  <a:srgbClr val="1F2937"/>
+                </a:solidFill>
+                <a:latin typeface="Arial"/>
+              </a:rPr>
+              <a:t>Один фактор</a:t>
+            </a:r>
+          </a:p>
+        </p:txBody>
+      </p:sp>
+      <p:sp>
+        <p:nvSpPr>
+          <p:cNvPr id="13" name="TextBox 12"/>
+          <p:cNvSpPr txBox="1"/>
+          <p:nvPr/>
+        </p:nvSpPr>
+        <p:spPr>
+          <a:xfrm>
+            <a:off x="6766560" y="3721608"/>
+            <a:ext cx="4645152" cy="1234440"/>
+          </a:xfrm>
+          <a:prstGeom prst="rect">
+            <a:avLst/>
+          </a:prstGeom>
+          <a:noFill/>
+        </p:spPr>
+        <p:txBody>
+          <a:bodyPr wrap="square" lIns="0" rIns="0" tIns="0" bIns="0" anchor="t">
+            <a:spAutoFit/>
+          </a:bodyPr>
+          <a:lstStyle/>
+          <a:p>
+            <a:pPr>
+              <a:spcAft>
+                <a:spcPts val="400"/>
+              </a:spcAft>
+            </a:pPr>
+            <a:r>
+              <a:rPr sz="1300" b="0">
+                <a:solidFill>
+                  <a:srgbClr val="6B7280"/>
+                </a:solidFill>
+                <a:latin typeface="Arial"/>
+              </a:rPr>
+              <a:t>λ = (0,9; 0,8; 0,7) ⇒ ρ₁₂ = 0,72, ρ₁₃ = 0,63, ρ₂₃ = 0,56;</a:t>
+            </a:r>
+          </a:p>
+          <a:p>
+            <a:pPr>
+              <a:spcAft>
+                <a:spcPts val="400"/>
+              </a:spcAft>
+            </a:pPr>
+            <a:r>
+              <a:rPr sz="1300" b="0">
+                <a:solidFill>
+                  <a:srgbClr val="6B7280"/>
+                </a:solidFill>
+                <a:latin typeface="Arial"/>
+              </a:rPr>
+              <a:t>общности 0,81, 0,64, 0,49. Шум εᵢ в корреляции не входит.</a:t>
+            </a:r>
+          </a:p>
+        </p:txBody>
+      </p:sp>
+      <p:sp>
+        <p:nvSpPr>
+          <p:cNvPr id="14" name="Rectangle 13"/>
+          <p:cNvSpPr/>
+          <p:nvPr/>
+        </p:nvSpPr>
+        <p:spPr>
+          <a:xfrm>
+            <a:off x="548640" y="5349240"/>
+            <a:ext cx="11094415" cy="457200"/>
+          </a:xfrm>
+          <a:prstGeom prst="rect">
+            <a:avLst/>
+          </a:prstGeom>
+          <a:solidFill>
+            <a:srgbClr val="D6EEF8"/>
+          </a:solidFill>
+          <a:ln w="6350">
+            <a:solidFill>
+              <a:srgbClr val="D6EEF8"/>
+            </a:solidFill>
+          </a:ln>
+          <a:effectLst/>
+        </p:spPr>
+        <p:style>
+          <a:lnRef idx="1">
+            <a:schemeClr val="accent1"/>
+          </a:lnRef>
+          <a:fillRef idx="3">
+            <a:schemeClr val="accent1"/>
+          </a:fillRef>
+          <a:effectRef idx="2">
+            <a:schemeClr val="accent1"/>
+          </a:effectRef>
+          <a:fontRef idx="minor">
+            <a:schemeClr val="lt1"/>
+          </a:fontRef>
+        </p:style>
+        <p:txBody>
+          <a:bodyPr rtlCol="0" anchor="ctr"/>
+          <a:lstStyle/>
+          <a:p>
+            <a:pPr algn="ctr"/>
+          </a:p>
+        </p:txBody>
+      </p:sp>
+      <p:sp>
+        <p:nvSpPr>
+          <p:cNvPr id="15" name="TextBox 14"/>
+          <p:cNvSpPr txBox="1"/>
+          <p:nvPr/>
+        </p:nvSpPr>
+        <p:spPr>
+          <a:xfrm>
+            <a:off x="777240" y="5349240"/>
+            <a:ext cx="10637215" cy="457200"/>
+          </a:xfrm>
+          <a:prstGeom prst="rect">
+            <a:avLst/>
+          </a:prstGeom>
+          <a:noFill/>
+        </p:spPr>
+        <p:txBody>
+          <a:bodyPr wrap="square" lIns="0" rIns="0" tIns="0" bIns="0" anchor="ctr">
+            <a:spAutoFit/>
+          </a:bodyPr>
+          <a:lstStyle/>
+          <a:p>
+            <a:pPr>
+              <a:spcAft>
+                <a:spcPts val="400"/>
+              </a:spcAft>
+            </a:pPr>
+            <a:r>
+              <a:rPr sz="1500" b="1">
+                <a:solidFill>
+                  <a:srgbClr val="1F2937"/>
+                </a:solidFill>
+                <a:latin typeface="Arial"/>
+              </a:rPr>
+              <a:t>Всё выводится из свойств дисперсии и ковариации: корреляции создают только общие факторы.</a:t>
+            </a:r>
+          </a:p>
+        </p:txBody>
+      </p:sp>
+    </p:spTree>
+  </p:cSld>
+  <p:clrMapOvr>
+    <a:masterClrMapping/>
+  </p:clrMapOvr>
+</p:sld>
+</file>
+
+<file path=ppt/slides/slide45.xml><?xml version="1.0" encoding="utf-8"?>
+<p:sld xmlns:a="http://schemas.openxmlformats.org/drawingml/2006/main" xmlns:p="http://schemas.openxmlformats.org/presentationml/2006/main" xmlns:r="http://schemas.openxmlformats.org/officeDocument/2006/relationships">
+  <p:cSld>
+    <p:spTree>
+      <p:nvGrpSpPr>
+        <p:cNvPr id="1" name=""/>
+        <p:cNvGrpSpPr/>
+        <p:nvPr/>
+      </p:nvGrpSpPr>
+      <p:grpSpPr/>
+      <p:sp>
+        <p:nvSpPr>
+          <p:cNvPr id="2" name="Title 1"/>
+          <p:cNvSpPr>
+            <a:spLocks noGrp="1"/>
+          </p:cNvSpPr>
+          <p:nvPr>
+            <p:ph type="title" idx="101"/>
+          </p:nvPr>
+        </p:nvSpPr>
+        <p:spPr/>
+        <p:txBody>
+          <a:bodyPr/>
+          <a:lstStyle/>
+          <a:p>
+            <a:r>
+              <a:rPr sz="2600" b="1">
+                <a:solidFill>
+                  <a:srgbClr val="1F2937"/>
+                </a:solidFill>
+                <a:latin typeface="Arial"/>
+              </a:rPr>
+              <a:t>Вращение и интерпретация</a:t>
+            </a:r>
+          </a:p>
+        </p:txBody>
+      </p:sp>
+      <p:sp>
+        <p:nvSpPr>
+          <p:cNvPr id="3" name="Slide Number Placeholder 0"/>
+          <p:cNvSpPr>
+            <a:spLocks noGrp="1"/>
+          </p:cNvSpPr>
+          <p:nvPr>
+            <p:ph type="sldNum" sz="quarter" idx="4294967295"/>
+          </p:nvPr>
+        </p:nvSpPr>
+        <p:spPr>
+          <a:xfrm>
+            <a:off x="11368735" y="6400800"/>
+            <a:ext cx="457200" cy="274320"/>
+          </a:xfrm>
+          <a:prstGeom prst="rect">
+            <a:avLst/>
+          </a:prstGeom>
+          <a:extLst>
+            <a:ext uri="{C572A759-6A51-4108-AA02-DFA0A04FC94B}">
+              <ma14:wrappingTextBoxFlag xmlns:ma14="http://schemas.microsoft.com/office/mac/drawingml/2011/main" val="0"/>
+            </a:ext>
+          </a:extLst>
+        </p:spPr>
+        <p:txBody>
+          <a:bodyPr/>
+          <a:lstStyle>
+            <a:lvl1pPr>
+              <a:defRPr sz="1000">
+                <a:solidFill>
+                  <a:srgbClr val="6B7280"/>
+                </a:solidFill>
+                <a:latin typeface="Arial"/>
+                <a:ea typeface="Arial"/>
+                <a:cs typeface="Arial"/>
+              </a:defRPr>
+            </a:lvl1pPr>
+          </a:lstStyle>
+          <a:p>
+            <a:pPr algn="r"/>
+            <a:fld id="{F7021451-1387-4CA6-816F-3879F97B5CBC}" type="slidenum">
+              <a:rPr b="0" lang="en-US"/>
+              <a:t>2</a:t>
+            </a:fld>
+            <a:endParaRPr lang="en-US"/>
+          </a:p>
+        </p:txBody>
+      </p:sp>
+      <p:pic>
+        <p:nvPicPr>
+          <p:cNvPr id="4" name="Picture 3" descr="04-fa-loadings.png"/>
+          <p:cNvPicPr>
+            <a:picLocks noChangeAspect="1"/>
+          </p:cNvPicPr>
+          <p:nvPr/>
+        </p:nvPicPr>
+        <p:blipFill>
+          <a:blip r:embed="rId2"/>
+          <a:stretch>
+            <a:fillRect/>
+          </a:stretch>
+        </p:blipFill>
+        <p:spPr>
+          <a:xfrm>
+            <a:off x="548640" y="1188720"/>
+            <a:ext cx="6675120" cy="3266822"/>
+          </a:xfrm>
+          <a:prstGeom prst="rect">
+            <a:avLst/>
+          </a:prstGeom>
+        </p:spPr>
+      </p:pic>
+      <p:pic>
+        <p:nvPicPr>
+          <p:cNvPr id="5" name="Picture 4" descr="f_42d7fb29462ebc73.png"/>
+          <p:cNvPicPr>
+            <a:picLocks noChangeAspect="1"/>
+          </p:cNvPicPr>
+          <p:nvPr/>
+        </p:nvPicPr>
+        <p:blipFill>
+          <a:blip r:embed="rId3"/>
+          <a:stretch>
+            <a:fillRect/>
+          </a:stretch>
+        </p:blipFill>
+        <p:spPr>
+          <a:xfrm>
+            <a:off x="7498079" y="1325880"/>
+            <a:ext cx="3685032" cy="551688"/>
+          </a:xfrm>
+          <a:prstGeom prst="rect">
+            <a:avLst/>
+          </a:prstGeom>
+        </p:spPr>
+      </p:pic>
+      <p:sp>
+        <p:nvSpPr>
+          <p:cNvPr id="6" name="Rectangle 5"/>
+          <p:cNvSpPr/>
+          <p:nvPr/>
+        </p:nvSpPr>
+        <p:spPr>
+          <a:xfrm>
+            <a:off x="7498079" y="2011680"/>
+            <a:ext cx="4142232" cy="1463040"/>
+          </a:xfrm>
+          <a:prstGeom prst="rect">
+            <a:avLst/>
+          </a:prstGeom>
+          <a:solidFill>
+            <a:srgbClr val="F5F7FA"/>
+          </a:solidFill>
+          <a:ln w="6350">
+            <a:solidFill>
+              <a:srgbClr val="D1D5DB"/>
+            </a:solidFill>
+          </a:ln>
+          <a:effectLst/>
+        </p:spPr>
+        <p:style>
+          <a:lnRef idx="1">
+            <a:schemeClr val="accent1"/>
+          </a:lnRef>
+          <a:fillRef idx="3">
+            <a:schemeClr val="accent1"/>
+          </a:fillRef>
+          <a:effectRef idx="2">
+            <a:schemeClr val="accent1"/>
+          </a:effectRef>
+          <a:fontRef idx="minor">
+            <a:schemeClr val="lt1"/>
+          </a:fontRef>
+        </p:style>
+        <p:txBody>
+          <a:bodyPr rtlCol="0" anchor="ctr"/>
+          <a:lstStyle/>
+          <a:p>
+            <a:pPr algn="ctr"/>
+          </a:p>
+        </p:txBody>
+      </p:sp>
+      <p:sp>
+        <p:nvSpPr>
+          <p:cNvPr id="7" name="TextBox 6"/>
+          <p:cNvSpPr txBox="1"/>
+          <p:nvPr/>
+        </p:nvSpPr>
+        <p:spPr>
+          <a:xfrm>
+            <a:off x="7726679" y="2194560"/>
+            <a:ext cx="3685032" cy="365760"/>
+          </a:xfrm>
+          <a:prstGeom prst="rect">
+            <a:avLst/>
+          </a:prstGeom>
+          <a:noFill/>
+        </p:spPr>
+        <p:txBody>
+          <a:bodyPr wrap="square" lIns="0" rIns="0" tIns="0" bIns="0" anchor="t">
+            <a:spAutoFit/>
+          </a:bodyPr>
+          <a:lstStyle/>
+          <a:p>
+            <a:pPr>
+              <a:spcAft>
+                <a:spcPts val="400"/>
+              </a:spcAft>
+            </a:pPr>
+            <a:r>
+              <a:rPr sz="1500" b="1">
+                <a:solidFill>
+                  <a:srgbClr val="1F2937"/>
+                </a:solidFill>
+                <a:latin typeface="Arial"/>
+              </a:rPr>
+              <a:t>Решение не единственно</a:t>
+            </a:r>
+          </a:p>
+        </p:txBody>
+      </p:sp>
+      <p:sp>
+        <p:nvSpPr>
+          <p:cNvPr id="8" name="TextBox 7"/>
+          <p:cNvSpPr txBox="1"/>
+          <p:nvPr/>
+        </p:nvSpPr>
+        <p:spPr>
+          <a:xfrm>
+            <a:off x="7726679" y="2578608"/>
+            <a:ext cx="3685032" cy="777240"/>
+          </a:xfrm>
+          <a:prstGeom prst="rect">
+            <a:avLst/>
+          </a:prstGeom>
+          <a:noFill/>
+        </p:spPr>
+        <p:txBody>
+          <a:bodyPr wrap="square" lIns="0" rIns="0" tIns="0" bIns="0" anchor="t">
+            <a:spAutoFit/>
+          </a:bodyPr>
+          <a:lstStyle/>
+          <a:p>
+            <a:pPr>
+              <a:spcAft>
+                <a:spcPts val="400"/>
+              </a:spcAft>
+            </a:pPr>
+            <a:r>
+              <a:rPr sz="1300" b="0">
+                <a:solidFill>
+                  <a:srgbClr val="6B7280"/>
+                </a:solidFill>
+                <a:latin typeface="Arial"/>
+              </a:rPr>
+              <a:t>поворот Q и смена знака фактора дают ту же R; общности h² не меняются</a:t>
+            </a:r>
+          </a:p>
+        </p:txBody>
+      </p:sp>
+      <p:sp>
+        <p:nvSpPr>
+          <p:cNvPr id="9" name="Rectangle 8"/>
+          <p:cNvSpPr/>
+          <p:nvPr/>
+        </p:nvSpPr>
+        <p:spPr>
+          <a:xfrm>
+            <a:off x="7498079" y="3611880"/>
+            <a:ext cx="4142232" cy="1463040"/>
+          </a:xfrm>
+          <a:prstGeom prst="rect">
+            <a:avLst/>
+          </a:prstGeom>
+          <a:solidFill>
+            <a:srgbClr val="D6EEF8"/>
+          </a:solidFill>
+          <a:ln w="6350">
+            <a:solidFill>
+              <a:srgbClr val="D6EEF8"/>
+            </a:solidFill>
+          </a:ln>
+          <a:effectLst/>
+        </p:spPr>
+        <p:style>
+          <a:lnRef idx="1">
+            <a:schemeClr val="accent1"/>
+          </a:lnRef>
+          <a:fillRef idx="3">
+            <a:schemeClr val="accent1"/>
+          </a:fillRef>
+          <a:effectRef idx="2">
+            <a:schemeClr val="accent1"/>
+          </a:effectRef>
+          <a:fontRef idx="minor">
+            <a:schemeClr val="lt1"/>
+          </a:fontRef>
+        </p:style>
+        <p:txBody>
+          <a:bodyPr rtlCol="0" anchor="ctr"/>
+          <a:lstStyle/>
+          <a:p>
+            <a:pPr algn="ctr"/>
+          </a:p>
+        </p:txBody>
+      </p:sp>
+      <p:sp>
+        <p:nvSpPr>
+          <p:cNvPr id="10" name="TextBox 9"/>
+          <p:cNvSpPr txBox="1"/>
+          <p:nvPr/>
+        </p:nvSpPr>
+        <p:spPr>
+          <a:xfrm>
+            <a:off x="7726679" y="3794760"/>
+            <a:ext cx="3685032" cy="365760"/>
+          </a:xfrm>
+          <a:prstGeom prst="rect">
+            <a:avLst/>
+          </a:prstGeom>
+          <a:noFill/>
+        </p:spPr>
+        <p:txBody>
+          <a:bodyPr wrap="square" lIns="0" rIns="0" tIns="0" bIns="0" anchor="t">
+            <a:spAutoFit/>
+          </a:bodyPr>
+          <a:lstStyle/>
+          <a:p>
+            <a:pPr>
+              <a:spcAft>
+                <a:spcPts val="400"/>
+              </a:spcAft>
+            </a:pPr>
+            <a:r>
+              <a:rPr sz="1500" b="1">
+                <a:solidFill>
+                  <a:srgbClr val="1F2937"/>
+                </a:solidFill>
+                <a:latin typeface="Arial"/>
+              </a:rPr>
+              <a:t>Varimax</a:t>
+            </a:r>
+          </a:p>
+        </p:txBody>
+      </p:sp>
+      <p:sp>
+        <p:nvSpPr>
+          <p:cNvPr id="11" name="TextBox 10"/>
+          <p:cNvSpPr txBox="1"/>
+          <p:nvPr/>
+        </p:nvSpPr>
+        <p:spPr>
+          <a:xfrm>
+            <a:off x="7726679" y="4178808"/>
+            <a:ext cx="3685032" cy="777240"/>
+          </a:xfrm>
+          <a:prstGeom prst="rect">
+            <a:avLst/>
+          </a:prstGeom>
+          <a:noFill/>
+        </p:spPr>
+        <p:txBody>
+          <a:bodyPr wrap="square" lIns="0" rIns="0" tIns="0" bIns="0" anchor="t">
+            <a:spAutoFit/>
+          </a:bodyPr>
+          <a:lstStyle/>
+          <a:p>
+            <a:pPr>
+              <a:spcAft>
+                <a:spcPts val="400"/>
+              </a:spcAft>
+            </a:pPr>
+            <a:r>
+              <a:rPr sz="1300" b="0">
+                <a:solidFill>
+                  <a:srgbClr val="1F2937"/>
+                </a:solidFill>
+                <a:latin typeface="Arial"/>
+              </a:rPr>
+              <a:t>поворот к «простой структуре»: у признака одна большая нагрузка. Название фактора даёт человек.</a:t>
+            </a:r>
+          </a:p>
+        </p:txBody>
+      </p:sp>
+      <p:sp>
+        <p:nvSpPr>
+          <p:cNvPr id="12" name="Rectangle 11"/>
+          <p:cNvSpPr/>
+          <p:nvPr/>
+        </p:nvSpPr>
+        <p:spPr>
+          <a:xfrm>
+            <a:off x="548640" y="5349240"/>
+            <a:ext cx="11094415" cy="457200"/>
+          </a:xfrm>
+          <a:prstGeom prst="rect">
+            <a:avLst/>
+          </a:prstGeom>
+          <a:solidFill>
+            <a:srgbClr val="D6EEF8"/>
+          </a:solidFill>
+          <a:ln w="6350">
+            <a:solidFill>
+              <a:srgbClr val="D6EEF8"/>
+            </a:solidFill>
+          </a:ln>
+          <a:effectLst/>
+        </p:spPr>
+        <p:style>
+          <a:lnRef idx="1">
+            <a:schemeClr val="accent1"/>
+          </a:lnRef>
+          <a:fillRef idx="3">
+            <a:schemeClr val="accent1"/>
+          </a:fillRef>
+          <a:effectRef idx="2">
+            <a:schemeClr val="accent1"/>
+          </a:effectRef>
+          <a:fontRef idx="minor">
+            <a:schemeClr val="lt1"/>
+          </a:fontRef>
+        </p:style>
+        <p:txBody>
+          <a:bodyPr rtlCol="0" anchor="ctr"/>
+          <a:lstStyle/>
+          <a:p>
+            <a:pPr algn="ctr"/>
+          </a:p>
+        </p:txBody>
+      </p:sp>
+      <p:sp>
+        <p:nvSpPr>
+          <p:cNvPr id="13" name="TextBox 12"/>
+          <p:cNvSpPr txBox="1"/>
+          <p:nvPr/>
+        </p:nvSpPr>
+        <p:spPr>
+          <a:xfrm>
+            <a:off x="777240" y="5349240"/>
+            <a:ext cx="10637215" cy="457200"/>
+          </a:xfrm>
+          <a:prstGeom prst="rect">
+            <a:avLst/>
+          </a:prstGeom>
+          <a:noFill/>
+        </p:spPr>
+        <p:txBody>
+          <a:bodyPr wrap="square" lIns="0" rIns="0" tIns="0" bIns="0" anchor="ctr">
+            <a:spAutoFit/>
+          </a:bodyPr>
+          <a:lstStyle/>
+          <a:p>
+            <a:pPr>
+              <a:spcAft>
+                <a:spcPts val="400"/>
+              </a:spcAft>
+            </a:pPr>
+            <a:r>
+              <a:rPr sz="1500" b="1">
+                <a:solidFill>
+                  <a:srgbClr val="1F2937"/>
+                </a:solidFill>
+                <a:latin typeface="Arial"/>
+              </a:rPr>
+              <a:t>После вращения: фактор 1 — точные науки (0,7–0,9), фактор 2 — гуманитарные предметы.</a:t>
+            </a:r>
+          </a:p>
+        </p:txBody>
+      </p:sp>
+    </p:spTree>
+  </p:cSld>
+  <p:clrMapOvr>
+    <a:masterClrMapping/>
+  </p:clrMapOvr>
+</p:sld>
+</file>
+
+<file path=ppt/slides/slide46.xml><?xml version="1.0" encoding="utf-8"?>
+<p:sld xmlns:a="http://schemas.openxmlformats.org/drawingml/2006/main" xmlns:p="http://schemas.openxmlformats.org/presentationml/2006/main" xmlns:r="http://schemas.openxmlformats.org/officeDocument/2006/relationships">
+  <p:cSld>
+    <p:spTree>
+      <p:nvGrpSpPr>
+        <p:cNvPr id="1" name=""/>
+        <p:cNvGrpSpPr/>
+        <p:nvPr/>
+      </p:nvGrpSpPr>
+      <p:grpSpPr/>
+      <p:sp>
+        <p:nvSpPr>
+          <p:cNvPr id="2" name="Title 1"/>
+          <p:cNvSpPr>
+            <a:spLocks noGrp="1"/>
+          </p:cNvSpPr>
+          <p:nvPr>
+            <p:ph type="title" idx="101"/>
+          </p:nvPr>
+        </p:nvSpPr>
+        <p:spPr/>
+        <p:txBody>
+          <a:bodyPr/>
+          <a:lstStyle/>
+          <a:p>
+            <a:r>
+              <a:rPr sz="2600" b="1">
+                <a:solidFill>
+                  <a:srgbClr val="1F2937"/>
+                </a:solidFill>
+                <a:latin typeface="Arial"/>
+              </a:rPr>
+              <a:t>Факторный анализ на практике</a:t>
+            </a:r>
+          </a:p>
+        </p:txBody>
+      </p:sp>
+      <p:sp>
+        <p:nvSpPr>
+          <p:cNvPr id="3" name="Slide Number Placeholder 0"/>
+          <p:cNvSpPr>
+            <a:spLocks noGrp="1"/>
+          </p:cNvSpPr>
+          <p:nvPr>
+            <p:ph type="sldNum" sz="quarter" idx="4294967295"/>
+          </p:nvPr>
+        </p:nvSpPr>
+        <p:spPr>
+          <a:xfrm>
+            <a:off x="11368735" y="6400800"/>
+            <a:ext cx="457200" cy="274320"/>
+          </a:xfrm>
+          <a:prstGeom prst="rect">
+            <a:avLst/>
+          </a:prstGeom>
+          <a:extLst>
+            <a:ext uri="{C572A759-6A51-4108-AA02-DFA0A04FC94B}">
+              <ma14:wrappingTextBoxFlag xmlns:ma14="http://schemas.microsoft.com/office/mac/drawingml/2011/main" val="0"/>
+            </a:ext>
+          </a:extLst>
+        </p:spPr>
+        <p:txBody>
+          <a:bodyPr/>
+          <a:lstStyle>
+            <a:lvl1pPr>
+              <a:defRPr sz="1000">
+                <a:solidFill>
+                  <a:srgbClr val="6B7280"/>
+                </a:solidFill>
+                <a:latin typeface="Arial"/>
+                <a:ea typeface="Arial"/>
+                <a:cs typeface="Arial"/>
+              </a:defRPr>
+            </a:lvl1pPr>
+          </a:lstStyle>
+          <a:p>
+            <a:pPr algn="r"/>
+            <a:fld id="{F7021451-1387-4CA6-816F-3879F97B5CBC}" type="slidenum">
+              <a:rPr b="0" lang="en-US"/>
+              <a:t>2</a:t>
+            </a:fld>
+            <a:endParaRPr lang="en-US"/>
+          </a:p>
+        </p:txBody>
+      </p:sp>
+      <p:sp>
+        <p:nvSpPr>
+          <p:cNvPr id="4" name="Rectangle 3"/>
+          <p:cNvSpPr/>
+          <p:nvPr/>
+        </p:nvSpPr>
+        <p:spPr>
+          <a:xfrm>
+            <a:off x="548640" y="1280160"/>
+            <a:ext cx="3566160" cy="1920240"/>
+          </a:xfrm>
+          <a:prstGeom prst="rect">
+            <a:avLst/>
+          </a:prstGeom>
+          <a:solidFill>
+            <a:srgbClr val="D6EEF8"/>
+          </a:solidFill>
+          <a:ln w="6350">
+            <a:solidFill>
+              <a:srgbClr val="D6EEF8"/>
+            </a:solidFill>
+          </a:ln>
+          <a:effectLst/>
+        </p:spPr>
+        <p:style>
+          <a:lnRef idx="1">
+            <a:schemeClr val="accent1"/>
+          </a:lnRef>
+          <a:fillRef idx="3">
+            <a:schemeClr val="accent1"/>
+          </a:fillRef>
+          <a:effectRef idx="2">
+            <a:schemeClr val="accent1"/>
+          </a:effectRef>
+          <a:fontRef idx="minor">
+            <a:schemeClr val="lt1"/>
+          </a:fontRef>
+        </p:style>
+        <p:txBody>
+          <a:bodyPr rtlCol="0" anchor="ctr"/>
+          <a:lstStyle/>
+          <a:p>
+            <a:pPr algn="ctr"/>
+          </a:p>
+        </p:txBody>
+      </p:sp>
+      <p:sp>
+        <p:nvSpPr>
+          <p:cNvPr id="5" name="TextBox 4"/>
+          <p:cNvSpPr txBox="1"/>
+          <p:nvPr/>
+        </p:nvSpPr>
+        <p:spPr>
+          <a:xfrm>
+            <a:off x="777240" y="1463039"/>
+            <a:ext cx="3108960" cy="365760"/>
+          </a:xfrm>
+          <a:prstGeom prst="rect">
+            <a:avLst/>
+          </a:prstGeom>
+          <a:noFill/>
+        </p:spPr>
+        <p:txBody>
+          <a:bodyPr wrap="square" lIns="0" rIns="0" tIns="0" bIns="0" anchor="t">
+            <a:spAutoFit/>
+          </a:bodyPr>
+          <a:lstStyle/>
+          <a:p>
+            <a:pPr>
+              <a:spcAft>
+                <a:spcPts val="400"/>
+              </a:spcAft>
+            </a:pPr>
+            <a:r>
+              <a:rPr sz="1500" b="1">
+                <a:solidFill>
+                  <a:srgbClr val="1F2937"/>
+                </a:solidFill>
+                <a:latin typeface="Arial"/>
+              </a:rPr>
+              <a:t>Сколько факторов</a:t>
+            </a:r>
+          </a:p>
+        </p:txBody>
+      </p:sp>
+      <p:sp>
+        <p:nvSpPr>
+          <p:cNvPr id="6" name="TextBox 5"/>
+          <p:cNvSpPr txBox="1"/>
+          <p:nvPr/>
+        </p:nvSpPr>
+        <p:spPr>
+          <a:xfrm>
+            <a:off x="777240" y="1847088"/>
+            <a:ext cx="3108960" cy="1234440"/>
+          </a:xfrm>
+          <a:prstGeom prst="rect">
+            <a:avLst/>
+          </a:prstGeom>
+          <a:noFill/>
+        </p:spPr>
+        <p:txBody>
+          <a:bodyPr wrap="square" lIns="0" rIns="0" tIns="0" bIns="0" anchor="t">
+            <a:spAutoFit/>
+          </a:bodyPr>
+          <a:lstStyle/>
+          <a:p>
+            <a:pPr>
+              <a:spcAft>
+                <a:spcPts val="400"/>
+              </a:spcAft>
+            </a:pPr>
+            <a:r>
+              <a:rPr sz="1300" b="0">
+                <a:solidFill>
+                  <a:srgbClr val="1F2937"/>
+                </a:solidFill>
+                <a:latin typeface="Arial"/>
+              </a:rPr>
+              <a:t>Σ собственных чисел R = d.</a:t>
+            </a:r>
+          </a:p>
+          <a:p>
+            <a:pPr>
+              <a:spcAft>
+                <a:spcPts val="400"/>
+              </a:spcAft>
+            </a:pPr>
+            <a:r>
+              <a:rPr sz="1300" b="0">
+                <a:solidFill>
+                  <a:srgbClr val="1F2937"/>
+                </a:solidFill>
+                <a:latin typeface="Arial"/>
+              </a:rPr>
+              <a:t>Кайзер: λ &gt; 1; «каменистая осыпь»: до локтя.</a:t>
+            </a:r>
+          </a:p>
+        </p:txBody>
+      </p:sp>
+      <p:graphicFrame>
+        <p:nvGraphicFramePr>
+          <p:cNvPr id="7" name="Table 6"/>
+          <p:cNvGraphicFramePr>
+            <a:graphicFrameLocks noGrp="1"/>
+          </p:cNvGraphicFramePr>
+          <p:nvPr/>
+        </p:nvGraphicFramePr>
+        <p:xfrm>
+          <a:off x="4297679" y="1280160"/>
+          <a:ext cx="7342632" cy="1828800"/>
+        </p:xfrm>
+        <a:graphic>
+          <a:graphicData uri="http://schemas.openxmlformats.org/drawingml/2006/table">
+            <a:tbl>
+              <a:tblPr firstRow="0" bandRow="0">
+                <a:tableStyleId>{5C22544A-7EE6-4342-B048-85BDC9FD1C3A}</a:tableStyleId>
+              </a:tblPr>
+              <a:tblGrid>
+                <a:gridCol w="1463040"/>
+                <a:gridCol w="2560320"/>
+                <a:gridCol w="3319272"/>
+              </a:tblGrid>
+              <a:tr h="457200">
+                <a:tc>
+                  <a:txBody>
+                    <a:bodyPr wrap="square"/>
+                    <a:lstStyle/>
+                    <a:p>
+                      <a:r>
+                        <a:rPr sz="1300" b="1">
+                          <a:solidFill>
+                            <a:srgbClr val="1F2937"/>
+                          </a:solidFill>
+                          <a:latin typeface="Arial"/>
+                        </a:rPr>
+                        <a:t/>
+                      </a:r>
+                    </a:p>
+                  </a:txBody>
+                  <a:tcPr marL="73152" marR="73152" marT="27432" marB="27432" anchor="ctr">
+                    <a:lnB w="6350">
+                      <a:solidFill>
+                        <a:srgbClr val="D1D5DB"/>
+                      </a:solidFill>
+                    </a:lnB>
+                    <a:lnT w="6350">
+                      <a:solidFill>
+                        <a:srgbClr val="D1D5DB"/>
+                      </a:solidFill>
+                    </a:lnT>
+                    <a:lnR w="6350">
+                      <a:solidFill>
+                        <a:srgbClr val="D1D5DB"/>
+                      </a:solidFill>
+                    </a:lnR>
+                    <a:lnL w="6350">
+                      <a:solidFill>
+                        <a:srgbClr val="D1D5DB"/>
+                      </a:solidFill>
+                    </a:lnL>
+                    <a:solidFill>
+                      <a:srgbClr val="F5F7FA"/>
+                    </a:solidFill>
+                  </a:tcPr>
+                </a:tc>
+                <a:tc>
+                  <a:txBody>
+                    <a:bodyPr wrap="square"/>
+                    <a:lstStyle/>
+                    <a:p>
+                      <a:r>
+                        <a:rPr sz="1300" b="1">
+                          <a:solidFill>
+                            <a:srgbClr val="1F2937"/>
+                          </a:solidFill>
+                          <a:latin typeface="Arial"/>
+                        </a:rPr>
+                        <a:t>PCA</a:t>
+                      </a:r>
+                    </a:p>
+                  </a:txBody>
+                  <a:tcPr marL="73152" marR="73152" marT="27432" marB="27432" anchor="ctr">
+                    <a:lnB w="6350">
+                      <a:solidFill>
+                        <a:srgbClr val="D1D5DB"/>
+                      </a:solidFill>
+                    </a:lnB>
+                    <a:lnT w="6350">
+                      <a:solidFill>
+                        <a:srgbClr val="D1D5DB"/>
+                      </a:solidFill>
+                    </a:lnT>
+                    <a:lnR w="6350">
+                      <a:solidFill>
+                        <a:srgbClr val="D1D5DB"/>
+                      </a:solidFill>
+                    </a:lnR>
+                    <a:lnL w="6350">
+                      <a:solidFill>
+                        <a:srgbClr val="D1D5DB"/>
+                      </a:solidFill>
+                    </a:lnL>
+                    <a:solidFill>
+                      <a:srgbClr val="F5F7FA"/>
+                    </a:solidFill>
+                  </a:tcPr>
+                </a:tc>
+                <a:tc>
+                  <a:txBody>
+                    <a:bodyPr wrap="square"/>
+                    <a:lstStyle/>
+                    <a:p>
+                      <a:r>
+                        <a:rPr sz="1300" b="1">
+                          <a:solidFill>
+                            <a:srgbClr val="1F2937"/>
+                          </a:solidFill>
+                          <a:latin typeface="Arial"/>
+                        </a:rPr>
+                        <a:t>Факторный анализ</a:t>
+                      </a:r>
+                    </a:p>
+                  </a:txBody>
+                  <a:tcPr marL="73152" marR="73152" marT="27432" marB="27432" anchor="ctr">
+                    <a:lnB w="6350">
+                      <a:solidFill>
+                        <a:srgbClr val="D1D5DB"/>
+                      </a:solidFill>
+                    </a:lnB>
+                    <a:lnT w="6350">
+                      <a:solidFill>
+                        <a:srgbClr val="D1D5DB"/>
+                      </a:solidFill>
+                    </a:lnT>
+                    <a:lnR w="6350">
+                      <a:solidFill>
+                        <a:srgbClr val="D1D5DB"/>
+                      </a:solidFill>
+                    </a:lnR>
+                    <a:lnL w="6350">
+                      <a:solidFill>
+                        <a:srgbClr val="D1D5DB"/>
+                      </a:solidFill>
+                    </a:lnL>
+                    <a:solidFill>
+                      <a:srgbClr val="F5F7FA"/>
+                    </a:solidFill>
+                  </a:tcPr>
+                </a:tc>
+              </a:tr>
+              <a:tr h="457200">
+                <a:tc>
+                  <a:txBody>
+                    <a:bodyPr wrap="square"/>
+                    <a:lstStyle/>
+                    <a:p>
+                      <a:r>
+                        <a:rPr sz="1300" b="0">
+                          <a:solidFill>
+                            <a:srgbClr val="1F2937"/>
+                          </a:solidFill>
+                          <a:latin typeface="Arial"/>
+                        </a:rPr>
+                        <a:t>объясняет</a:t>
+                      </a:r>
+                    </a:p>
+                  </a:txBody>
+                  <a:tcPr marL="73152" marR="73152" marT="27432" marB="27432" anchor="ctr">
+                    <a:lnB w="6350">
+                      <a:solidFill>
+                        <a:srgbClr val="D1D5DB"/>
+                      </a:solidFill>
+                    </a:lnB>
+                    <a:lnT w="6350">
+                      <a:solidFill>
+                        <a:srgbClr val="D1D5DB"/>
+                      </a:solidFill>
+                    </a:lnT>
+                    <a:lnR w="6350">
+                      <a:solidFill>
+                        <a:srgbClr val="D1D5DB"/>
+                      </a:solidFill>
+                    </a:lnR>
+                    <a:lnL w="6350">
+                      <a:solidFill>
+                        <a:srgbClr val="D1D5DB"/>
+                      </a:solidFill>
+                    </a:lnL>
+                    <a:solidFill>
+                      <a:srgbClr val="FFFFFF"/>
+                    </a:solidFill>
+                  </a:tcPr>
+                </a:tc>
+                <a:tc>
+                  <a:txBody>
+                    <a:bodyPr wrap="square"/>
+                    <a:lstStyle/>
+                    <a:p>
+                      <a:r>
+                        <a:rPr sz="1300" b="0">
+                          <a:solidFill>
+                            <a:srgbClr val="1F2937"/>
+                          </a:solidFill>
+                          <a:latin typeface="Arial"/>
+                        </a:rPr>
+                        <a:t>всю дисперсию</a:t>
+                      </a:r>
+                    </a:p>
+                  </a:txBody>
+                  <a:tcPr marL="73152" marR="73152" marT="27432" marB="27432" anchor="ctr">
+                    <a:lnB w="6350">
+                      <a:solidFill>
+                        <a:srgbClr val="D1D5DB"/>
+                      </a:solidFill>
+                    </a:lnB>
+                    <a:lnT w="6350">
+                      <a:solidFill>
+                        <a:srgbClr val="D1D5DB"/>
+                      </a:solidFill>
+                    </a:lnT>
+                    <a:lnR w="6350">
+                      <a:solidFill>
+                        <a:srgbClr val="D1D5DB"/>
+                      </a:solidFill>
+                    </a:lnR>
+                    <a:lnL w="6350">
+                      <a:solidFill>
+                        <a:srgbClr val="D1D5DB"/>
+                      </a:solidFill>
+                    </a:lnL>
+                    <a:solidFill>
+                      <a:srgbClr val="FFFFFF"/>
+                    </a:solidFill>
+                  </a:tcPr>
+                </a:tc>
+                <a:tc>
+                  <a:txBody>
+                    <a:bodyPr wrap="square"/>
+                    <a:lstStyle/>
+                    <a:p>
+                      <a:r>
+                        <a:rPr sz="1300" b="0">
+                          <a:solidFill>
+                            <a:srgbClr val="1F2937"/>
+                          </a:solidFill>
+                          <a:latin typeface="Arial"/>
+                        </a:rPr>
+                        <a:t>общую часть, корреляции</a:t>
+                      </a:r>
+                    </a:p>
+                  </a:txBody>
+                  <a:tcPr marL="73152" marR="73152" marT="27432" marB="27432" anchor="ctr">
+                    <a:lnB w="6350">
+                      <a:solidFill>
+                        <a:srgbClr val="D1D5DB"/>
+                      </a:solidFill>
+                    </a:lnB>
+                    <a:lnT w="6350">
+                      <a:solidFill>
+                        <a:srgbClr val="D1D5DB"/>
+                      </a:solidFill>
+                    </a:lnT>
+                    <a:lnR w="6350">
+                      <a:solidFill>
+                        <a:srgbClr val="D1D5DB"/>
+                      </a:solidFill>
+                    </a:lnR>
+                    <a:lnL w="6350">
+                      <a:solidFill>
+                        <a:srgbClr val="D1D5DB"/>
+                      </a:solidFill>
+                    </a:lnL>
+                    <a:solidFill>
+                      <a:srgbClr val="FFFFFF"/>
+                    </a:solidFill>
+                  </a:tcPr>
+                </a:tc>
+              </a:tr>
+              <a:tr h="457200">
+                <a:tc>
+                  <a:txBody>
+                    <a:bodyPr wrap="square"/>
+                    <a:lstStyle/>
+                    <a:p>
+                      <a:r>
+                        <a:rPr sz="1300" b="0">
+                          <a:solidFill>
+                            <a:srgbClr val="1F2937"/>
+                          </a:solidFill>
+                          <a:latin typeface="Arial"/>
+                        </a:rPr>
+                        <a:t>модель</a:t>
+                      </a:r>
+                    </a:p>
+                  </a:txBody>
+                  <a:tcPr marL="73152" marR="73152" marT="27432" marB="27432" anchor="ctr">
+                    <a:lnB w="6350">
+                      <a:solidFill>
+                        <a:srgbClr val="D1D5DB"/>
+                      </a:solidFill>
+                    </a:lnB>
+                    <a:lnT w="6350">
+                      <a:solidFill>
+                        <a:srgbClr val="D1D5DB"/>
+                      </a:solidFill>
+                    </a:lnT>
+                    <a:lnR w="6350">
+                      <a:solidFill>
+                        <a:srgbClr val="D1D5DB"/>
+                      </a:solidFill>
+                    </a:lnR>
+                    <a:lnL w="6350">
+                      <a:solidFill>
+                        <a:srgbClr val="D1D5DB"/>
+                      </a:solidFill>
+                    </a:lnL>
+                    <a:solidFill>
+                      <a:srgbClr val="FFFFFF"/>
+                    </a:solidFill>
+                  </a:tcPr>
+                </a:tc>
+                <a:tc>
+                  <a:txBody>
+                    <a:bodyPr wrap="square"/>
+                    <a:lstStyle/>
+                    <a:p>
+                      <a:r>
+                        <a:rPr sz="1300" b="0">
+                          <a:solidFill>
+                            <a:srgbClr val="1F2937"/>
+                          </a:solidFill>
+                          <a:latin typeface="Arial"/>
+                        </a:rPr>
+                        <a:t>поворот осей</a:t>
+                      </a:r>
+                    </a:p>
+                  </a:txBody>
+                  <a:tcPr marL="73152" marR="73152" marT="27432" marB="27432" anchor="ctr">
+                    <a:lnB w="6350">
+                      <a:solidFill>
+                        <a:srgbClr val="D1D5DB"/>
+                      </a:solidFill>
+                    </a:lnB>
+                    <a:lnT w="6350">
+                      <a:solidFill>
+                        <a:srgbClr val="D1D5DB"/>
+                      </a:solidFill>
+                    </a:lnT>
+                    <a:lnR w="6350">
+                      <a:solidFill>
+                        <a:srgbClr val="D1D5DB"/>
+                      </a:solidFill>
+                    </a:lnR>
+                    <a:lnL w="6350">
+                      <a:solidFill>
+                        <a:srgbClr val="D1D5DB"/>
+                      </a:solidFill>
+                    </a:lnL>
+                    <a:solidFill>
+                      <a:srgbClr val="FFFFFF"/>
+                    </a:solidFill>
+                  </a:tcPr>
+                </a:tc>
+                <a:tc>
+                  <a:txBody>
+                    <a:bodyPr wrap="square"/>
+                    <a:lstStyle/>
+                    <a:p>
+                      <a:r>
+                        <a:rPr sz="1300" b="0">
+                          <a:solidFill>
+                            <a:srgbClr val="1F2937"/>
+                          </a:solidFill>
+                          <a:latin typeface="Arial"/>
+                        </a:rPr>
+                        <a:t>R = ΛΛᵀ + Ψ</a:t>
+                      </a:r>
+                    </a:p>
+                  </a:txBody>
+                  <a:tcPr marL="73152" marR="73152" marT="27432" marB="27432" anchor="ctr">
+                    <a:lnB w="6350">
+                      <a:solidFill>
+                        <a:srgbClr val="D1D5DB"/>
+                      </a:solidFill>
+                    </a:lnB>
+                    <a:lnT w="6350">
+                      <a:solidFill>
+                        <a:srgbClr val="D1D5DB"/>
+                      </a:solidFill>
+                    </a:lnT>
+                    <a:lnR w="6350">
+                      <a:solidFill>
+                        <a:srgbClr val="D1D5DB"/>
+                      </a:solidFill>
+                    </a:lnR>
+                    <a:lnL w="6350">
+                      <a:solidFill>
+                        <a:srgbClr val="D1D5DB"/>
+                      </a:solidFill>
+                    </a:lnL>
+                    <a:solidFill>
+                      <a:srgbClr val="FFFFFF"/>
+                    </a:solidFill>
+                  </a:tcPr>
+                </a:tc>
+              </a:tr>
+              <a:tr h="457200">
+                <a:tc>
+                  <a:txBody>
+                    <a:bodyPr wrap="square"/>
+                    <a:lstStyle/>
+                    <a:p>
+                      <a:r>
+                        <a:rPr sz="1300" b="0">
+                          <a:solidFill>
+                            <a:srgbClr val="1F2937"/>
+                          </a:solidFill>
+                          <a:latin typeface="Arial"/>
+                        </a:rPr>
+                        <a:t>шум εᵢ</a:t>
+                      </a:r>
+                    </a:p>
+                  </a:txBody>
+                  <a:tcPr marL="73152" marR="73152" marT="27432" marB="27432" anchor="ctr">
+                    <a:lnB w="6350">
+                      <a:solidFill>
+                        <a:srgbClr val="D1D5DB"/>
+                      </a:solidFill>
+                    </a:lnB>
+                    <a:lnT w="6350">
+                      <a:solidFill>
+                        <a:srgbClr val="D1D5DB"/>
+                      </a:solidFill>
+                    </a:lnT>
+                    <a:lnR w="6350">
+                      <a:solidFill>
+                        <a:srgbClr val="D1D5DB"/>
+                      </a:solidFill>
+                    </a:lnR>
+                    <a:lnL w="6350">
+                      <a:solidFill>
+                        <a:srgbClr val="D1D5DB"/>
+                      </a:solidFill>
+                    </a:lnL>
+                    <a:solidFill>
+                      <a:srgbClr val="FFFFFF"/>
+                    </a:solidFill>
+                  </a:tcPr>
+                </a:tc>
+                <a:tc>
+                  <a:txBody>
+                    <a:bodyPr wrap="square"/>
+                    <a:lstStyle/>
+                    <a:p>
+                      <a:r>
+                        <a:rPr sz="1300" b="0">
+                          <a:solidFill>
+                            <a:srgbClr val="1F2937"/>
+                          </a:solidFill>
+                          <a:latin typeface="Arial"/>
+                        </a:rPr>
+                        <a:t>в компонентах</a:t>
+                      </a:r>
+                    </a:p>
+                  </a:txBody>
+                  <a:tcPr marL="73152" marR="73152" marT="27432" marB="27432" anchor="ctr">
+                    <a:lnB w="6350">
+                      <a:solidFill>
+                        <a:srgbClr val="D1D5DB"/>
+                      </a:solidFill>
+                    </a:lnB>
+                    <a:lnT w="6350">
+                      <a:solidFill>
+                        <a:srgbClr val="D1D5DB"/>
+                      </a:solidFill>
+                    </a:lnT>
+                    <a:lnR w="6350">
+                      <a:solidFill>
+                        <a:srgbClr val="D1D5DB"/>
+                      </a:solidFill>
+                    </a:lnR>
+                    <a:lnL w="6350">
+                      <a:solidFill>
+                        <a:srgbClr val="D1D5DB"/>
+                      </a:solidFill>
+                    </a:lnL>
+                    <a:solidFill>
+                      <a:srgbClr val="FFFFFF"/>
+                    </a:solidFill>
+                  </a:tcPr>
+                </a:tc>
+                <a:tc>
+                  <a:txBody>
+                    <a:bodyPr wrap="square"/>
+                    <a:lstStyle/>
+                    <a:p>
+                      <a:r>
+                        <a:rPr sz="1300" b="0">
+                          <a:solidFill>
+                            <a:srgbClr val="1F2937"/>
+                          </a:solidFill>
+                          <a:latin typeface="Arial"/>
+                        </a:rPr>
+                        <a:t>отделён в ψᵢ</a:t>
+                      </a:r>
+                    </a:p>
+                  </a:txBody>
+                  <a:tcPr marL="73152" marR="73152" marT="27432" marB="27432" anchor="ctr">
+                    <a:lnB w="6350">
+                      <a:solidFill>
+                        <a:srgbClr val="D1D5DB"/>
+                      </a:solidFill>
+                    </a:lnB>
+                    <a:lnT w="6350">
+                      <a:solidFill>
+                        <a:srgbClr val="D1D5DB"/>
+                      </a:solidFill>
+                    </a:lnT>
+                    <a:lnR w="6350">
+                      <a:solidFill>
+                        <a:srgbClr val="D1D5DB"/>
+                      </a:solidFill>
+                    </a:lnR>
+                    <a:lnL w="6350">
+                      <a:solidFill>
+                        <a:srgbClr val="D1D5DB"/>
+                      </a:solidFill>
+                    </a:lnL>
+                    <a:solidFill>
+                      <a:srgbClr val="FFFFFF"/>
+                    </a:solidFill>
+                  </a:tcPr>
+                </a:tc>
+              </a:tr>
+            </a:tbl>
+          </a:graphicData>
+        </a:graphic>
+      </p:graphicFrame>
+      <p:sp>
+        <p:nvSpPr>
+          <p:cNvPr id="8" name="Rectangle 7"/>
+          <p:cNvSpPr/>
+          <p:nvPr/>
+        </p:nvSpPr>
+        <p:spPr>
+          <a:xfrm>
+            <a:off x="548640" y="3383280"/>
+            <a:ext cx="11094415" cy="1691640"/>
+          </a:xfrm>
+          <a:prstGeom prst="rect">
+            <a:avLst/>
+          </a:prstGeom>
+          <a:solidFill>
+            <a:srgbClr val="FDE9D3"/>
+          </a:solidFill>
+          <a:ln w="6350">
+            <a:solidFill>
+              <a:srgbClr val="FDE9D3"/>
+            </a:solidFill>
+          </a:ln>
+          <a:effectLst/>
+        </p:spPr>
+        <p:style>
+          <a:lnRef idx="1">
+            <a:schemeClr val="accent1"/>
+          </a:lnRef>
+          <a:fillRef idx="3">
+            <a:schemeClr val="accent1"/>
+          </a:fillRef>
+          <a:effectRef idx="2">
+            <a:schemeClr val="accent1"/>
+          </a:effectRef>
+          <a:fontRef idx="minor">
+            <a:schemeClr val="lt1"/>
+          </a:fontRef>
+        </p:style>
+        <p:txBody>
+          <a:bodyPr rtlCol="0" anchor="ctr"/>
+          <a:lstStyle/>
+          <a:p>
+            <a:pPr algn="ctr"/>
+          </a:p>
+        </p:txBody>
+      </p:sp>
+      <p:sp>
+        <p:nvSpPr>
+          <p:cNvPr id="9" name="TextBox 8"/>
+          <p:cNvSpPr txBox="1"/>
+          <p:nvPr/>
+        </p:nvSpPr>
+        <p:spPr>
+          <a:xfrm>
+            <a:off x="777240" y="3566160"/>
+            <a:ext cx="10637215" cy="365760"/>
+          </a:xfrm>
+          <a:prstGeom prst="rect">
+            <a:avLst/>
+          </a:prstGeom>
+          <a:noFill/>
+        </p:spPr>
+        <p:txBody>
+          <a:bodyPr wrap="square" lIns="0" rIns="0" tIns="0" bIns="0" anchor="t">
+            <a:spAutoFit/>
+          </a:bodyPr>
+          <a:lstStyle/>
+          <a:p>
+            <a:pPr>
+              <a:spcAft>
+                <a:spcPts val="400"/>
+              </a:spcAft>
+            </a:pPr>
+            <a:r>
+              <a:rPr sz="1500" b="1">
+                <a:solidFill>
+                  <a:srgbClr val="1F2937"/>
+                </a:solidFill>
+                <a:latin typeface="Arial"/>
+              </a:rPr>
+              <a:t>Ловушки</a:t>
+            </a:r>
+          </a:p>
+        </p:txBody>
+      </p:sp>
+      <p:sp>
+        <p:nvSpPr>
+          <p:cNvPr id="10" name="TextBox 9"/>
+          <p:cNvSpPr txBox="1"/>
+          <p:nvPr/>
+        </p:nvSpPr>
+        <p:spPr>
+          <a:xfrm>
+            <a:off x="777240" y="3950208"/>
+            <a:ext cx="10637215" cy="1005840"/>
+          </a:xfrm>
+          <a:prstGeom prst="rect">
+            <a:avLst/>
+          </a:prstGeom>
+          <a:noFill/>
+        </p:spPr>
+        <p:txBody>
+          <a:bodyPr wrap="square" lIns="0" rIns="0" tIns="0" bIns="0" anchor="t">
+            <a:spAutoFit/>
+          </a:bodyPr>
+          <a:lstStyle/>
+          <a:p>
+            <a:pPr>
+              <a:spcAft>
+                <a:spcPts val="400"/>
+              </a:spcAft>
+            </a:pPr>
+            <a:r>
+              <a:rPr sz="1300" b="0">
+                <a:solidFill>
+                  <a:srgbClr val="6B7280"/>
+                </a:solidFill>
+                <a:latin typeface="Arial"/>
+              </a:rPr>
+              <a:t>Обратные вопросы дают отрицательные нагрузки: группируйте по |λ|.  Малая общность (h² &lt; 0,2) — признак без общего фактора.</a:t>
+            </a:r>
+          </a:p>
+          <a:p>
+            <a:pPr>
+              <a:spcAft>
+                <a:spcPts val="400"/>
+              </a:spcAft>
+            </a:pPr>
+            <a:r>
+              <a:rPr sz="1300" b="0">
+                <a:solidFill>
+                  <a:srgbClr val="6B7280"/>
+                </a:solidFill>
+                <a:latin typeface="Arial"/>
+              </a:rPr>
+              <a:t>Нужно n ≫ d (хотя бы 100–200 наблюдений).  Факторы описывают корреляции, а не причины.</a:t>
+            </a:r>
+          </a:p>
+        </p:txBody>
+      </p:sp>
+      <p:sp>
+        <p:nvSpPr>
+          <p:cNvPr id="11" name="Rectangle 10"/>
+          <p:cNvSpPr/>
+          <p:nvPr/>
+        </p:nvSpPr>
+        <p:spPr>
+          <a:xfrm>
+            <a:off x="548640" y="5349240"/>
+            <a:ext cx="11094415" cy="457200"/>
+          </a:xfrm>
+          <a:prstGeom prst="rect">
+            <a:avLst/>
+          </a:prstGeom>
+          <a:solidFill>
+            <a:srgbClr val="D6EEF8"/>
+          </a:solidFill>
+          <a:ln w="6350">
+            <a:solidFill>
+              <a:srgbClr val="D6EEF8"/>
+            </a:solidFill>
+          </a:ln>
+          <a:effectLst/>
+        </p:spPr>
+        <p:style>
+          <a:lnRef idx="1">
+            <a:schemeClr val="accent1"/>
+          </a:lnRef>
+          <a:fillRef idx="3">
+            <a:schemeClr val="accent1"/>
+          </a:fillRef>
+          <a:effectRef idx="2">
+            <a:schemeClr val="accent1"/>
+          </a:effectRef>
+          <a:fontRef idx="minor">
+            <a:schemeClr val="lt1"/>
+          </a:fontRef>
+        </p:style>
+        <p:txBody>
+          <a:bodyPr rtlCol="0" anchor="ctr"/>
+          <a:lstStyle/>
+          <a:p>
+            <a:pPr algn="ctr"/>
+          </a:p>
+        </p:txBody>
+      </p:sp>
+      <p:sp>
+        <p:nvSpPr>
+          <p:cNvPr id="12" name="TextBox 11"/>
+          <p:cNvSpPr txBox="1"/>
+          <p:nvPr/>
+        </p:nvSpPr>
+        <p:spPr>
+          <a:xfrm>
+            <a:off x="777240" y="5349240"/>
+            <a:ext cx="10637215" cy="457200"/>
+          </a:xfrm>
+          <a:prstGeom prst="rect">
+            <a:avLst/>
+          </a:prstGeom>
+          <a:noFill/>
+        </p:spPr>
+        <p:txBody>
+          <a:bodyPr wrap="square" lIns="0" rIns="0" tIns="0" bIns="0" anchor="ctr">
+            <a:spAutoFit/>
+          </a:bodyPr>
+          <a:lstStyle/>
+          <a:p>
+            <a:pPr>
+              <a:spcAft>
+                <a:spcPts val="400"/>
+              </a:spcAft>
+            </a:pPr>
+            <a:r>
+              <a:rPr sz="1500" b="1">
+                <a:solidFill>
+                  <a:srgbClr val="1F2937"/>
+                </a:solidFill>
+                <a:latin typeface="Arial"/>
+              </a:rPr>
+              <a:t>FactorAnalysis(n_components=2, rotation="varimax").fit(Z): нагрузки .components_.T, ψ — .noise_variance_</a:t>
             </a:r>
           </a:p>
         </p:txBody>

--- a/lectures/04_expectation-variance-itmo.pptx
+++ b/lectures/04_expectation-variance-itmo.pptx
@@ -31,7 +31,6 @@
     <p:sldId id="279" r:id="rId30"/>
     <p:sldId id="280" r:id="rId31"/>
     <p:sldId id="281" r:id="rId32"/>
-    <p:sldId id="282" r:id="rId33"/>
     <p:sldId id="283" r:id="rId34"/>
     <p:sldId id="284" r:id="rId35"/>
     <p:sldId id="285" r:id="rId36"/>
@@ -10207,426 +10206,6 @@
 </p:sld>
 </file>
 
-<file path=ppt/slides/slide27.xml><?xml version="1.0" encoding="utf-8"?>
-<p:sld xmlns:a="http://schemas.openxmlformats.org/drawingml/2006/main" xmlns:p="http://schemas.openxmlformats.org/presentationml/2006/main" xmlns:r="http://schemas.openxmlformats.org/officeDocument/2006/relationships">
-  <p:cSld>
-    <p:spTree>
-      <p:nvGrpSpPr>
-        <p:cNvPr id="1" name=""/>
-        <p:cNvGrpSpPr/>
-        <p:nvPr/>
-      </p:nvGrpSpPr>
-      <p:grpSpPr/>
-      <p:sp>
-        <p:nvSpPr>
-          <p:cNvPr id="2" name="Title 1"/>
-          <p:cNvSpPr>
-            <a:spLocks noGrp="1"/>
-          </p:cNvSpPr>
-          <p:nvPr>
-            <p:ph type="title" idx="101"/>
-          </p:nvPr>
-        </p:nvSpPr>
-        <p:spPr/>
-        <p:txBody>
-          <a:bodyPr/>
-          <a:lstStyle/>
-          <a:p>
-            <a:r>
-              <a:rPr sz="2600" b="1">
-                <a:solidFill>
-                  <a:srgbClr val="1F2937"/>
-                </a:solidFill>
-                <a:latin typeface="Arial"/>
-              </a:rPr>
-              <a:t>Закон больших чисел из неравенства Чебышёва</a:t>
-            </a:r>
-          </a:p>
-        </p:txBody>
-      </p:sp>
-      <p:sp>
-        <p:nvSpPr>
-          <p:cNvPr id="25" name="Slide Number Placeholder 0"/>
-          <p:cNvSpPr>
-            <a:spLocks noGrp="1"/>
-          </p:cNvSpPr>
-          <p:nvPr>
-            <p:ph type="sldNum" sz="quarter" idx="4294967295"/>
-          </p:nvPr>
-        </p:nvSpPr>
-        <p:spPr>
-          <a:xfrm>
-            <a:off x="11368735" y="6400800"/>
-            <a:ext cx="457200" cy="274320"/>
-          </a:xfrm>
-          <a:prstGeom prst="rect">
-            <a:avLst/>
-          </a:prstGeom>
-          <a:extLst>
-            <a:ext uri="{C572A759-6A51-4108-AA02-DFA0A04FC94B}">
-              <ma14:wrappingTextBoxFlag xmlns:ma14="http://schemas.microsoft.com/office/mac/drawingml/2011/main" val="0"/>
-            </a:ext>
-          </a:extLst>
-        </p:spPr>
-        <p:txBody>
-          <a:bodyPr/>
-          <a:lstStyle>
-            <a:lvl1pPr>
-              <a:defRPr sz="1000">
-                <a:solidFill>
-                  <a:srgbClr val="6B7280"/>
-                </a:solidFill>
-                <a:latin typeface="Arial"/>
-                <a:ea typeface="Arial"/>
-                <a:cs typeface="Arial"/>
-              </a:defRPr>
-            </a:lvl1pPr>
-          </a:lstStyle>
-          <a:p>
-            <a:pPr algn="r"/>
-            <a:fld id="{F7021451-1387-4CA6-816F-3879F97B5CBC}" type="slidenum">
-              <a:rPr b="0" lang="en-US"/>
-              <a:t>2</a:t>
-            </a:fld>
-            <a:endParaRPr lang="en-US"/>
-          </a:p>
-        </p:txBody>
-      </p:sp>
-      <p:pic>
-        <p:nvPicPr>
-          <p:cNvPr id="26" name="Picture 25" descr="f_329f16f17688.png"/>
-          <p:cNvPicPr>
-            <a:picLocks noChangeAspect="1"/>
-          </p:cNvPicPr>
-          <p:nvPr/>
-        </p:nvPicPr>
-        <p:blipFill>
-          <a:blip r:embed="rId2"/>
-          <a:stretch>
-            <a:fillRect/>
-          </a:stretch>
-        </p:blipFill>
-        <p:spPr>
-          <a:xfrm>
-            <a:off x="548640" y="1371600"/>
-            <a:ext cx="5284073" cy="824423"/>
-          </a:xfrm>
-          <a:prstGeom prst="rect">
-            <a:avLst/>
-          </a:prstGeom>
-        </p:spPr>
-      </p:pic>
-      <p:sp>
-        <p:nvSpPr>
-          <p:cNvPr id="27" name="TextBox 26"/>
-          <p:cNvSpPr txBox="1"/>
-          <p:nvPr/>
-        </p:nvSpPr>
-        <p:spPr>
-          <a:xfrm>
-            <a:off x="548640" y="2377440"/>
-            <a:ext cx="10972800" cy="548640"/>
-          </a:xfrm>
-          <a:prstGeom prst="rect">
-            <a:avLst/>
-          </a:prstGeom>
-          <a:noFill/>
-        </p:spPr>
-        <p:txBody>
-          <a:bodyPr wrap="square" lIns="0" rIns="0" tIns="0" bIns="0" anchor="t">
-            <a:spAutoFit/>
-          </a:bodyPr>
-          <a:lstStyle/>
-          <a:p>
-            <a:pPr>
-              <a:spcAft>
-                <a:spcPts val="400"/>
-              </a:spcAft>
-            </a:pPr>
-            <a:r>
-              <a:rPr sz="1600" b="0">
-                <a:solidFill>
-                  <a:srgbClr val="1F2937"/>
-                </a:solidFill>
-                <a:latin typeface="Arial"/>
-              </a:rPr>
-              <a:t>X₁, …, Xₙ независимы и одинаково распределены: среднее сходится к математическому ожиданию.</a:t>
-            </a:r>
-          </a:p>
-        </p:txBody>
-      </p:sp>
-      <p:sp>
-        <p:nvSpPr>
-          <p:cNvPr id="28" name="Rectangle 27"/>
-          <p:cNvSpPr/>
-          <p:nvPr/>
-        </p:nvSpPr>
-        <p:spPr>
-          <a:xfrm>
-            <a:off x="548640" y="3063240"/>
-            <a:ext cx="6035040" cy="2468880"/>
-          </a:xfrm>
-          <a:prstGeom prst="rect">
-            <a:avLst/>
-          </a:prstGeom>
-          <a:solidFill>
-            <a:srgbClr val="D6EEF8"/>
-          </a:solidFill>
-          <a:ln w="6350">
-            <a:solidFill>
-              <a:srgbClr val="D6EEF8"/>
-            </a:solidFill>
-          </a:ln>
-          <a:effectLst/>
-        </p:spPr>
-        <p:style>
-          <a:lnRef idx="1">
-            <a:schemeClr val="accent1"/>
-          </a:lnRef>
-          <a:fillRef idx="3">
-            <a:schemeClr val="accent1"/>
-          </a:fillRef>
-          <a:effectRef idx="2">
-            <a:schemeClr val="accent1"/>
-          </a:effectRef>
-          <a:fontRef idx="minor">
-            <a:schemeClr val="lt1"/>
-          </a:fontRef>
-        </p:style>
-        <p:txBody>
-          <a:bodyPr rtlCol="0" anchor="ctr"/>
-          <a:lstStyle/>
-          <a:p>
-            <a:pPr algn="ctr"/>
-          </a:p>
-        </p:txBody>
-      </p:sp>
-      <p:sp>
-        <p:nvSpPr>
-          <p:cNvPr id="29" name="TextBox 28"/>
-          <p:cNvSpPr txBox="1"/>
-          <p:nvPr/>
-        </p:nvSpPr>
-        <p:spPr>
-          <a:xfrm>
-            <a:off x="777240" y="3246120"/>
-            <a:ext cx="5577840" cy="365760"/>
-          </a:xfrm>
-          <a:prstGeom prst="rect">
-            <a:avLst/>
-          </a:prstGeom>
-          <a:noFill/>
-        </p:spPr>
-        <p:txBody>
-          <a:bodyPr wrap="square" lIns="0" rIns="0" tIns="0" bIns="0" anchor="t">
-            <a:spAutoFit/>
-          </a:bodyPr>
-          <a:lstStyle/>
-          <a:p>
-            <a:pPr>
-              <a:spcAft>
-                <a:spcPts val="400"/>
-              </a:spcAft>
-            </a:pPr>
-            <a:r>
-              <a:rPr sz="1500" b="1">
-                <a:solidFill>
-                  <a:srgbClr val="1F2937"/>
-                </a:solidFill>
-                <a:latin typeface="Arial"/>
-              </a:rPr>
-              <a:t>Сколько опросить?</a:t>
-            </a:r>
-          </a:p>
-        </p:txBody>
-      </p:sp>
-      <p:sp>
-        <p:nvSpPr>
-          <p:cNvPr id="30" name="TextBox 29"/>
-          <p:cNvSpPr txBox="1"/>
-          <p:nvPr/>
-        </p:nvSpPr>
-        <p:spPr>
-          <a:xfrm>
-            <a:off x="777240" y="3657600"/>
-            <a:ext cx="5577840" cy="1783080"/>
-          </a:xfrm>
-          <a:prstGeom prst="rect">
-            <a:avLst/>
-          </a:prstGeom>
-          <a:noFill/>
-        </p:spPr>
-        <p:txBody>
-          <a:bodyPr wrap="square" lIns="0" rIns="0" tIns="0" bIns="0" anchor="t">
-            <a:spAutoFit/>
-          </a:bodyPr>
-          <a:lstStyle/>
-          <a:p>
-            <a:pPr>
-              <a:spcAft>
-                <a:spcPts val="400"/>
-              </a:spcAft>
-            </a:pPr>
-            <a:r>
-              <a:rPr sz="1400" b="0">
-                <a:solidFill>
-                  <a:srgbClr val="1F2937"/>
-                </a:solidFill>
-                <a:latin typeface="Arial"/>
-              </a:rPr>
-              <a:t>Доля довольных с точностью ± 0,05 с вероятностью ≥ 95 %. Индикатор: σ² ≤ 1/4.</a:t>
-            </a:r>
-          </a:p>
-          <a:p>
-            <a:pPr>
-              <a:spcAft>
-                <a:spcPts val="400"/>
-              </a:spcAft>
-            </a:pPr>
-            <a:r>
-              <a:rPr sz="1400" b="0">
-                <a:solidFill>
-                  <a:srgbClr val="1F2937"/>
-                </a:solidFill>
-                <a:latin typeface="Arial"/>
-              </a:rPr>
-              <a:t>(1/4) / (n · 0,05²) ≤ 0,05  →  n ≥ 2000</a:t>
-            </a:r>
-          </a:p>
-        </p:txBody>
-      </p:sp>
-      <p:sp>
-        <p:nvSpPr>
-          <p:cNvPr id="31" name="Rectangle 30"/>
-          <p:cNvSpPr/>
-          <p:nvPr/>
-        </p:nvSpPr>
-        <p:spPr>
-          <a:xfrm>
-            <a:off x="6858000" y="3063240"/>
-            <a:ext cx="4782312" cy="2468880"/>
-          </a:xfrm>
-          <a:prstGeom prst="rect">
-            <a:avLst/>
-          </a:prstGeom>
-          <a:solidFill>
-            <a:srgbClr val="F5F7FA"/>
-          </a:solidFill>
-          <a:ln w="6350">
-            <a:solidFill>
-              <a:srgbClr val="D1D5DB"/>
-            </a:solidFill>
-          </a:ln>
-          <a:effectLst/>
-        </p:spPr>
-        <p:style>
-          <a:lnRef idx="1">
-            <a:schemeClr val="accent1"/>
-          </a:lnRef>
-          <a:fillRef idx="3">
-            <a:schemeClr val="accent1"/>
-          </a:fillRef>
-          <a:effectRef idx="2">
-            <a:schemeClr val="accent1"/>
-          </a:effectRef>
-          <a:fontRef idx="minor">
-            <a:schemeClr val="lt1"/>
-          </a:fontRef>
-        </p:style>
-        <p:txBody>
-          <a:bodyPr rtlCol="0" anchor="ctr"/>
-          <a:lstStyle/>
-          <a:p>
-            <a:pPr algn="ctr"/>
-          </a:p>
-        </p:txBody>
-      </p:sp>
-      <p:sp>
-        <p:nvSpPr>
-          <p:cNvPr id="32" name="TextBox 31"/>
-          <p:cNvSpPr txBox="1"/>
-          <p:nvPr/>
-        </p:nvSpPr>
-        <p:spPr>
-          <a:xfrm>
-            <a:off x="7086600" y="3246120"/>
-            <a:ext cx="4325112" cy="365760"/>
-          </a:xfrm>
-          <a:prstGeom prst="rect">
-            <a:avLst/>
-          </a:prstGeom>
-          <a:noFill/>
-        </p:spPr>
-        <p:txBody>
-          <a:bodyPr wrap="square" lIns="0" rIns="0" tIns="0" bIns="0" anchor="t">
-            <a:spAutoFit/>
-          </a:bodyPr>
-          <a:lstStyle/>
-          <a:p>
-            <a:pPr>
-              <a:spcAft>
-                <a:spcPts val="400"/>
-              </a:spcAft>
-            </a:pPr>
-            <a:r>
-              <a:rPr sz="1500" b="1">
-                <a:solidFill>
-                  <a:srgbClr val="1F2937"/>
-                </a:solidFill>
-                <a:latin typeface="Arial"/>
-              </a:rPr>
-              <a:t>Дальше в курсе</a:t>
-            </a:r>
-          </a:p>
-        </p:txBody>
-      </p:sp>
-      <p:sp>
-        <p:nvSpPr>
-          <p:cNvPr id="33" name="TextBox 32"/>
-          <p:cNvSpPr txBox="1"/>
-          <p:nvPr/>
-        </p:nvSpPr>
-        <p:spPr>
-          <a:xfrm>
-            <a:off x="7086600" y="3657600"/>
-            <a:ext cx="4325112" cy="1783080"/>
-          </a:xfrm>
-          <a:prstGeom prst="rect">
-            <a:avLst/>
-          </a:prstGeom>
-          <a:noFill/>
-        </p:spPr>
-        <p:txBody>
-          <a:bodyPr wrap="square" lIns="0" rIns="0" tIns="0" bIns="0" anchor="t">
-            <a:spAutoFit/>
-          </a:bodyPr>
-          <a:lstStyle/>
-          <a:p>
-            <a:pPr>
-              <a:spcAft>
-                <a:spcPts val="400"/>
-              </a:spcAft>
-            </a:pPr>
-            <a:r>
-              <a:rPr sz="1400" b="0">
-                <a:solidFill>
-                  <a:srgbClr val="6B7280"/>
-                </a:solidFill>
-                <a:latin typeface="Arial"/>
-              </a:rPr>
-              <a:t>Центральная предельная теорема даст точнее: n ≈ 385. Чебышёв не знает формы распределения и платит за это запасом.</a:t>
-            </a:r>
-          </a:p>
-        </p:txBody>
-      </p:sp>
-    </p:spTree>
-  </p:cSld>
-  <p:clrMapOvr>
-    <a:masterClrMapping/>
-  </p:clrMapOvr>
-</p:sld>
-</file>
-
 <file path=ppt/slides/slide28.xml><?xml version="1.0" encoding="utf-8"?>
 <p:sld xmlns:a="http://schemas.openxmlformats.org/drawingml/2006/main" xmlns:p="http://schemas.openxmlformats.org/presentationml/2006/main" xmlns:r="http://schemas.openxmlformats.org/officeDocument/2006/relationships">
   <p:cSld>
@@ -13006,7 +12585,7 @@
                 </a:solidFill>
                 <a:latin typeface="Arial"/>
               </a:rPr>
-              <a:t>На семинаре всё проверяем симуляциями: ЗБЧ, σ/√n, Чебышёв, ddof, корреляции на реальных данных.</a:t>
+              <a:t>На семинаре всё проверяем симуляциями: σ/√n, Чебышёв, ddof, корреляции на реальных данных, факторный анализ анкеты.</a:t>
             </a:r>
           </a:p>
         </p:txBody>
@@ -19461,7 +19040,7 @@
                 </a:solidFill>
                 <a:latin typeface="Arial"/>
               </a:rPr>
-              <a:t>Разброс среднего n наблюдений — σ/√n; отсюда закон больших чисел.</a:t>
+              <a:t>Разброс среднего n наблюдений — σ/√n: вдвое точнее — вчетверо больше данных.</a:t>
             </a:r>
           </a:p>
         </p:txBody>
@@ -23585,39 +23164,7 @@
                 </a:solidFill>
                 <a:latin typeface="Arial"/>
               </a:rPr>
-              <a:t>Частота nᵢ/n значения xᵢ близка к вероятности pᵢ, поэтому среднее арифметическое наблюдений близко к EX.</a:t>
-            </a:r>
-          </a:p>
-          <a:p>
-            <a:pPr>
-              <a:spcAft>
-                <a:spcPts val="400"/>
-              </a:spcAft>
-            </a:pPr>
-            <a:r>
-              <a:rPr sz="1500" b="0">
-                <a:solidFill>
-                  <a:srgbClr val="1F2937"/>
-                </a:solidFill>
-                <a:latin typeface="Arial"/>
-              </a:rPr>
-              <a:t/>
-            </a:r>
-          </a:p>
-          <a:p>
-            <a:pPr>
-              <a:spcAft>
-                <a:spcPts val="400"/>
-              </a:spcAft>
-            </a:pPr>
-            <a:r>
-              <a:rPr sz="1500" b="0">
-                <a:solidFill>
-                  <a:srgbClr val="1F2937"/>
-                </a:solidFill>
-                <a:latin typeface="Arial"/>
-              </a:rPr>
-              <a:t>Строго это закон больших чисел — докажем его в конце лекции через неравенство Чебышёва.</a:t>
+              <a:t>Частота nᵢ/n значения xᵢ близка к вероятности pᵢ, поэтому среднее арифметическое многих наблюдений близко к EX. Точная формулировка — закон больших чисел — в лекции 5.</a:t>
             </a:r>
           </a:p>
         </p:txBody>
